--- a/V2授课PPT/W01-第1次课-带着C语言底子学Python.pptx
+++ b/V2授课PPT/W01-第1次课-带着C语言底子学Python.pptx
@@ -55,6 +55,9 @@
     <p:sldId id="334" r:id="rId86"/>
     <p:sldId id="336" r:id="rId88"/>
     <p:sldId id="337" r:id="rId89"/>
+    <p:sldId id="368" r:id="rId74"/>
+    <p:sldId id="369" r:id="rId68"/>
+    <p:sldId id="370" r:id="rId76"/>
     <p:sldId id="338" r:id="rId90"/>
     <p:sldId id="339" r:id="rId91"/>
     <p:sldId id="340" r:id="rId92"/>
@@ -9130,7 +9133,7 @@
                 </a:solidFill>
                 <a:latin typeface="微软雅黑"/>
               </a:rPr>
-              <a:t>10 / 66</a:t>
+              <a:t>10 / 69</a:t>
             </a:r>
           </a:p>
         </p:txBody>
@@ -9836,7 +9839,7 @@
                 </a:solidFill>
                 <a:latin typeface="微软雅黑"/>
               </a:rPr>
-              <a:t>11 / 66</a:t>
+              <a:t>11 / 69</a:t>
             </a:r>
           </a:p>
         </p:txBody>
@@ -10542,7 +10545,7 @@
                 </a:solidFill>
                 <a:latin typeface="微软雅黑"/>
               </a:rPr>
-              <a:t>12 / 66</a:t>
+              <a:t>12 / 69</a:t>
             </a:r>
           </a:p>
         </p:txBody>
@@ -11248,7 +11251,7 @@
                 </a:solidFill>
                 <a:latin typeface="微软雅黑"/>
               </a:rPr>
-              <a:t>13 / 66</a:t>
+              <a:t>13 / 69</a:t>
             </a:r>
           </a:p>
         </p:txBody>
@@ -11734,7 +11737,7 @@
                 </a:solidFill>
                 <a:latin typeface="微软雅黑"/>
               </a:rPr>
-              <a:t>14 / 66</a:t>
+              <a:t>14 / 69</a:t>
             </a:r>
           </a:p>
         </p:txBody>
@@ -12677,7 +12680,7 @@
                 </a:solidFill>
                 <a:latin typeface="微软雅黑"/>
               </a:rPr>
-              <a:t>15 / 66</a:t>
+              <a:t>15 / 69</a:t>
             </a:r>
           </a:p>
         </p:txBody>
@@ -13383,7 +13386,7 @@
                 </a:solidFill>
                 <a:latin typeface="微软雅黑"/>
               </a:rPr>
-              <a:t>16 / 66</a:t>
+              <a:t>16 / 69</a:t>
             </a:r>
           </a:p>
         </p:txBody>
@@ -13857,7 +13860,7 @@
                 </a:solidFill>
                 <a:latin typeface="微软雅黑"/>
               </a:rPr>
-              <a:t>17 / 66</a:t>
+              <a:t>17 / 69</a:t>
             </a:r>
           </a:p>
         </p:txBody>
@@ -14563,7 +14566,7 @@
                 </a:solidFill>
                 <a:latin typeface="微软雅黑"/>
               </a:rPr>
-              <a:t>18 / 66</a:t>
+              <a:t>18 / 69</a:t>
             </a:r>
           </a:p>
         </p:txBody>
@@ -15535,7 +15538,7 @@
                 </a:solidFill>
                 <a:latin typeface="微软雅黑"/>
               </a:rPr>
-              <a:t>19 / 66</a:t>
+              <a:t>19 / 69</a:t>
             </a:r>
           </a:p>
         </p:txBody>
@@ -17263,7 +17266,7 @@
                 </a:solidFill>
                 <a:latin typeface="微软雅黑"/>
               </a:rPr>
-              <a:t>2 / 66</a:t>
+              <a:t>2 / 69</a:t>
             </a:r>
           </a:p>
         </p:txBody>
@@ -18118,7 +18121,7 @@
                 </a:solidFill>
                 <a:latin typeface="微软雅黑"/>
               </a:rPr>
-              <a:t>20 / 66</a:t>
+              <a:t>20 / 69</a:t>
             </a:r>
           </a:p>
         </p:txBody>
@@ -19088,7 +19091,7 @@
                 </a:solidFill>
                 <a:latin typeface="微软雅黑"/>
               </a:rPr>
-              <a:t>21 / 66</a:t>
+              <a:t>21 / 69</a:t>
             </a:r>
           </a:p>
         </p:txBody>
@@ -20058,7 +20061,7 @@
                 </a:solidFill>
                 <a:latin typeface="微软雅黑"/>
               </a:rPr>
-              <a:t>22 / 66</a:t>
+              <a:t>22 / 69</a:t>
             </a:r>
           </a:p>
         </p:txBody>
@@ -20724,7 +20727,7 @@
                 </a:solidFill>
                 <a:latin typeface="微软雅黑"/>
               </a:rPr>
-              <a:t>23 / 66</a:t>
+              <a:t>23 / 69</a:t>
             </a:r>
           </a:p>
         </p:txBody>
@@ -21694,7 +21697,7 @@
                 </a:solidFill>
                 <a:latin typeface="微软雅黑"/>
               </a:rPr>
-              <a:t>24 / 66</a:t>
+              <a:t>24 / 69</a:t>
             </a:r>
           </a:p>
         </p:txBody>
@@ -22360,7 +22363,7 @@
                 </a:solidFill>
                 <a:latin typeface="微软雅黑"/>
               </a:rPr>
-              <a:t>25 / 66</a:t>
+              <a:t>25 / 69</a:t>
             </a:r>
           </a:p>
         </p:txBody>
@@ -23330,7 +23333,7 @@
                 </a:solidFill>
                 <a:latin typeface="微软雅黑"/>
               </a:rPr>
-              <a:t>26 / 66</a:t>
+              <a:t>26 / 69</a:t>
             </a:r>
           </a:p>
         </p:txBody>
@@ -23996,7 +23999,7 @@
                 </a:solidFill>
                 <a:latin typeface="微软雅黑"/>
               </a:rPr>
-              <a:t>27 / 66</a:t>
+              <a:t>27 / 69</a:t>
             </a:r>
           </a:p>
         </p:txBody>
@@ -24966,7 +24969,7 @@
                 </a:solidFill>
                 <a:latin typeface="微软雅黑"/>
               </a:rPr>
-              <a:t>28 / 66</a:t>
+              <a:t>28 / 69</a:t>
             </a:r>
           </a:p>
         </p:txBody>
@@ -25632,7 +25635,7 @@
                 </a:solidFill>
                 <a:latin typeface="微软雅黑"/>
               </a:rPr>
-              <a:t>29 / 66</a:t>
+              <a:t>29 / 69</a:t>
             </a:r>
           </a:p>
         </p:txBody>
@@ -26487,7 +26490,7 @@
                 </a:solidFill>
                 <a:latin typeface="微软雅黑"/>
               </a:rPr>
-              <a:t>3 / 66</a:t>
+              <a:t>3 / 69</a:t>
             </a:r>
           </a:p>
         </p:txBody>
@@ -27457,7 +27460,7 @@
                 </a:solidFill>
                 <a:latin typeface="微软雅黑"/>
               </a:rPr>
-              <a:t>30 / 66</a:t>
+              <a:t>30 / 69</a:t>
             </a:r>
           </a:p>
         </p:txBody>
@@ -27993,7 +27996,7 @@
                 </a:solidFill>
                 <a:latin typeface="微软雅黑"/>
               </a:rPr>
-              <a:t>31 / 66</a:t>
+              <a:t>31 / 69</a:t>
             </a:r>
           </a:p>
         </p:txBody>
@@ -28965,7 +28968,7 @@
                 </a:solidFill>
                 <a:latin typeface="微软雅黑"/>
               </a:rPr>
-              <a:t>32 / 66</a:t>
+              <a:t>32 / 69</a:t>
             </a:r>
           </a:p>
         </p:txBody>
@@ -29671,7 +29674,7 @@
                 </a:solidFill>
                 <a:latin typeface="微软雅黑"/>
               </a:rPr>
-              <a:t>33 / 66</a:t>
+              <a:t>33 / 69</a:t>
             </a:r>
           </a:p>
         </p:txBody>
@@ -30134,7 +30137,7 @@
                 </a:solidFill>
                 <a:latin typeface="微软雅黑"/>
               </a:rPr>
-              <a:t>34 / 66</a:t>
+              <a:t>34 / 69</a:t>
             </a:r>
           </a:p>
         </p:txBody>
@@ -30616,7 +30619,7 @@
                 </a:solidFill>
                 <a:latin typeface="微软雅黑"/>
               </a:rPr>
-              <a:t>35 / 66</a:t>
+              <a:t>35 / 69</a:t>
             </a:r>
           </a:p>
         </p:txBody>
@@ -31471,7 +31474,7 @@
                 </a:solidFill>
                 <a:latin typeface="微软雅黑"/>
               </a:rPr>
-              <a:t>36 / 66</a:t>
+              <a:t>36 / 69</a:t>
             </a:r>
           </a:p>
         </p:txBody>
@@ -33189,7 +33192,7 @@
                 </a:solidFill>
                 <a:latin typeface="微软雅黑"/>
               </a:rPr>
-              <a:t>37 / 66</a:t>
+              <a:t>37 / 69</a:t>
             </a:r>
           </a:p>
         </p:txBody>
@@ -33981,7 +33984,7 @@
                 </a:solidFill>
                 <a:latin typeface="微软雅黑"/>
               </a:rPr>
-              <a:t>38 / 66</a:t>
+              <a:t>38 / 69</a:t>
             </a:r>
           </a:p>
         </p:txBody>
@@ -34614,7 +34617,7 @@
                 </a:solidFill>
                 <a:latin typeface="微软雅黑"/>
               </a:rPr>
-              <a:t>39 / 66</a:t>
+              <a:t>39 / 69</a:t>
             </a:r>
           </a:p>
         </p:txBody>
@@ -35586,7 +35589,7 @@
                 </a:solidFill>
                 <a:latin typeface="微软雅黑"/>
               </a:rPr>
-              <a:t>4 / 66</a:t>
+              <a:t>4 / 69</a:t>
             </a:r>
           </a:p>
         </p:txBody>
@@ -36506,7 +36509,7 @@
                 </a:solidFill>
                 <a:latin typeface="微软雅黑"/>
               </a:rPr>
-              <a:t>40 / 66</a:t>
+              <a:t>40 / 69</a:t>
             </a:r>
           </a:p>
         </p:txBody>
@@ -37426,7 +37429,7 @@
                 </a:solidFill>
                 <a:latin typeface="微软雅黑"/>
               </a:rPr>
-              <a:t>41 / 66</a:t>
+              <a:t>41 / 69</a:t>
             </a:r>
           </a:p>
         </p:txBody>
@@ -38346,7 +38349,7 @@
                 </a:solidFill>
                 <a:latin typeface="微软雅黑"/>
               </a:rPr>
-              <a:t>42 / 66</a:t>
+              <a:t>42 / 69</a:t>
             </a:r>
           </a:p>
         </p:txBody>
@@ -39285,7 +39288,7 @@
                 </a:solidFill>
                 <a:latin typeface="微软雅黑"/>
               </a:rPr>
-              <a:t>43 / 66</a:t>
+              <a:t>43 / 69</a:t>
             </a:r>
           </a:p>
         </p:txBody>
@@ -40201,7 +40204,7 @@
                 </a:solidFill>
                 <a:latin typeface="微软雅黑"/>
               </a:rPr>
-              <a:t>44 / 66</a:t>
+              <a:t>44 / 69</a:t>
             </a:r>
           </a:p>
         </p:txBody>
@@ -41125,7 +41128,7 @@
                 </a:solidFill>
                 <a:latin typeface="微软雅黑"/>
               </a:rPr>
-              <a:t>45 / 66</a:t>
+              <a:t>45 / 69</a:t>
             </a:r>
           </a:p>
         </p:txBody>
@@ -41917,7 +41920,7 @@
                 </a:solidFill>
                 <a:latin typeface="微软雅黑"/>
               </a:rPr>
-              <a:t>46 / 66</a:t>
+              <a:t>46 / 69</a:t>
             </a:r>
           </a:p>
         </p:txBody>
@@ -42623,7 +42626,7 @@
                 </a:solidFill>
                 <a:latin typeface="微软雅黑"/>
               </a:rPr>
-              <a:t>47 / 66</a:t>
+              <a:t>47 / 69</a:t>
             </a:r>
           </a:p>
         </p:txBody>
@@ -43415,7 +43418,7 @@
                 </a:solidFill>
                 <a:latin typeface="微软雅黑"/>
               </a:rPr>
-              <a:t>48 / 66</a:t>
+              <a:t>48 / 69</a:t>
             </a:r>
           </a:p>
         </p:txBody>
@@ -44270,7 +44273,7 @@
                 </a:solidFill>
                 <a:latin typeface="微软雅黑"/>
               </a:rPr>
-              <a:t>49 / 66</a:t>
+              <a:t>49 / 69</a:t>
             </a:r>
           </a:p>
         </p:txBody>
@@ -45738,7 +45741,7 @@
                 </a:solidFill>
                 <a:latin typeface="微软雅黑"/>
               </a:rPr>
-              <a:t>5 / 66</a:t>
+              <a:t>5 / 69</a:t>
             </a:r>
           </a:p>
         </p:txBody>
@@ -46446,7 +46449,7 @@
                 </a:solidFill>
                 <a:latin typeface="微软雅黑"/>
               </a:rPr>
-              <a:t>50 / 66</a:t>
+              <a:t>50 / 69</a:t>
             </a:r>
           </a:p>
         </p:txBody>
@@ -47086,7 +47089,7 @@
                 </a:solidFill>
                 <a:latin typeface="微软雅黑"/>
               </a:rPr>
-              <a:t>51 / 66</a:t>
+              <a:t>54 / 69</a:t>
             </a:r>
           </a:p>
         </p:txBody>
@@ -47671,7 +47674,7 @@
                 </a:solidFill>
                 <a:latin typeface="微软雅黑"/>
               </a:rPr>
-              <a:t>52 / 66</a:t>
+              <a:t>55 / 69</a:t>
             </a:r>
           </a:p>
         </p:txBody>
@@ -48463,7 +48466,7 @@
                 </a:solidFill>
                 <a:latin typeface="微软雅黑"/>
               </a:rPr>
-              <a:t>53 / 66</a:t>
+              <a:t>56 / 69</a:t>
             </a:r>
           </a:p>
         </p:txBody>
@@ -49057,7 +49060,7 @@
                 </a:solidFill>
                 <a:latin typeface="微软雅黑"/>
               </a:rPr>
-              <a:t>54 / 66</a:t>
+              <a:t>57 / 69</a:t>
             </a:r>
           </a:p>
         </p:txBody>
@@ -50713,7 +50716,7 @@
                 </a:solidFill>
                 <a:latin typeface="微软雅黑"/>
               </a:rPr>
-              <a:t>55 / 66</a:t>
+              <a:t>58 / 69</a:t>
             </a:r>
           </a:p>
         </p:txBody>
@@ -51511,7 +51514,7 @@
                 </a:solidFill>
                 <a:latin typeface="微软雅黑"/>
               </a:rPr>
-              <a:t>56 / 66</a:t>
+              <a:t>59 / 69</a:t>
             </a:r>
           </a:p>
         </p:txBody>
@@ -52657,7 +52660,7 @@
                 </a:solidFill>
                 <a:latin typeface="微软雅黑"/>
               </a:rPr>
-              <a:t>57 / 66</a:t>
+              <a:t>60 / 69</a:t>
             </a:r>
           </a:p>
         </p:txBody>
@@ -53510,7 +53513,7 @@
                 </a:solidFill>
                 <a:latin typeface="微软雅黑"/>
               </a:rPr>
-              <a:t>58 / 66</a:t>
+              <a:t>61 / 69</a:t>
             </a:r>
           </a:p>
         </p:txBody>
@@ -54482,7 +54485,7 @@
                 </a:solidFill>
                 <a:latin typeface="微软雅黑"/>
               </a:rPr>
-              <a:t>59 / 66</a:t>
+              <a:t>62 / 69</a:t>
             </a:r>
           </a:p>
         </p:txBody>
@@ -55188,7 +55191,7 @@
                 </a:solidFill>
                 <a:latin typeface="微软雅黑"/>
               </a:rPr>
-              <a:t>6 / 66</a:t>
+              <a:t>6 / 69</a:t>
             </a:r>
           </a:p>
         </p:txBody>
@@ -56160,7 +56163,7 @@
                 </a:solidFill>
                 <a:latin typeface="微软雅黑"/>
               </a:rPr>
-              <a:t>60 / 66</a:t>
+              <a:t>63 / 69</a:t>
             </a:r>
           </a:p>
         </p:txBody>
@@ -57419,7 +57422,7 @@
                 </a:solidFill>
                 <a:latin typeface="微软雅黑"/>
               </a:rPr>
-              <a:t>61 / 66</a:t>
+              <a:t>64 / 69</a:t>
             </a:r>
           </a:p>
         </p:txBody>
@@ -58391,7 +58394,7 @@
                 </a:solidFill>
                 <a:latin typeface="微软雅黑"/>
               </a:rPr>
-              <a:t>62 / 66</a:t>
+              <a:t>65 / 69</a:t>
             </a:r>
           </a:p>
         </p:txBody>
@@ -59363,7 +59366,7 @@
                 </a:solidFill>
                 <a:latin typeface="微软雅黑"/>
               </a:rPr>
-              <a:t>63 / 66</a:t>
+              <a:t>66 / 69</a:t>
             </a:r>
           </a:p>
         </p:txBody>
@@ -60155,7 +60158,7 @@
                 </a:solidFill>
                 <a:latin typeface="微软雅黑"/>
               </a:rPr>
-              <a:t>64 / 66</a:t>
+              <a:t>67 / 69</a:t>
             </a:r>
           </a:p>
         </p:txBody>
@@ -60515,7 +60518,7 @@
                 </a:solidFill>
                 <a:latin typeface="微软雅黑"/>
               </a:rPr>
-              <a:t>65 / 66</a:t>
+              <a:t>68 / 69</a:t>
             </a:r>
           </a:p>
         </p:txBody>
@@ -60886,6 +60889,3118 @@
 </p:sld>
 </file>
 
+<file path=ppt/slides/slide67.xml><?xml version="1.0" encoding="utf-8"?>
+<p:sld xmlns:a="http://schemas.openxmlformats.org/drawingml/2006/main" xmlns:p="http://schemas.openxmlformats.org/presentationml/2006/main" xmlns:r="http://schemas.openxmlformats.org/officeDocument/2006/relationships">
+  <p:cSld>
+    <p:spTree>
+      <p:nvGrpSpPr>
+        <p:cNvPr id="1" name=""/>
+        <p:cNvGrpSpPr/>
+        <p:nvPr/>
+      </p:nvGrpSpPr>
+      <p:grpSpPr/>
+      <p:sp>
+        <p:nvSpPr>
+          <p:cNvPr id="2" name="Rounded Rectangle 1"/>
+          <p:cNvSpPr/>
+          <p:nvPr/>
+        </p:nvSpPr>
+        <p:spPr>
+          <a:xfrm>
+            <a:off x="0" y="0"/>
+            <a:ext cx="12191695" cy="64008"/>
+          </a:xfrm>
+          <a:prstGeom prst="roundRect">
+            <a:avLst>
+              <a:gd name="adj" fmla="val 50000"/>
+            </a:avLst>
+          </a:prstGeom>
+          <a:solidFill>
+            <a:srgbClr val="0B5E54"/>
+          </a:solidFill>
+          <a:ln>
+            <a:noFill/>
+          </a:ln>
+          <a:effectLst/>
+        </p:spPr>
+        <p:style>
+          <a:lnRef idx="1">
+            <a:schemeClr val="accent1"/>
+          </a:lnRef>
+          <a:fillRef idx="3">
+            <a:schemeClr val="accent1"/>
+          </a:fillRef>
+          <a:effectRef idx="2">
+            <a:schemeClr val="accent1"/>
+          </a:effectRef>
+          <a:fontRef idx="minor">
+            <a:schemeClr val="lt1"/>
+          </a:fontRef>
+        </p:style>
+        <p:txBody>
+          <a:bodyPr rtlCol="0" anchor="ctr"/>
+          <a:lstStyle/>
+          <a:p>
+            <a:pPr algn="ctr"/>
+          </a:p>
+        </p:txBody>
+      </p:sp>
+      <p:sp>
+        <p:nvSpPr>
+          <p:cNvPr id="3" name="TextBox 2"/>
+          <p:cNvSpPr txBox="1"/>
+          <p:nvPr/>
+        </p:nvSpPr>
+        <p:spPr>
+          <a:xfrm>
+            <a:off x="475488" y="146304"/>
+            <a:ext cx="8229600" cy="292608"/>
+          </a:xfrm>
+          <a:prstGeom prst="rect">
+            <a:avLst/>
+          </a:prstGeom>
+          <a:noFill/>
+        </p:spPr>
+        <p:txBody>
+          <a:bodyPr wrap="square" anchor="t" lIns="0" rIns="0" tIns="0" bIns="0">
+            <a:spAutoFit/>
+          </a:bodyPr>
+          <a:lstStyle/>
+          <a:p>
+            <a:pPr algn="l">
+              <a:lnSpc>
+                <a:spcPct val="114000"/>
+              </a:lnSpc>
+            </a:pPr>
+            <a:r>
+              <a:rPr sz="1100" b="1">
+                <a:solidFill>
+                  <a:srgbClr val="0B5E54"/>
+                </a:solidFill>
+              </a:rPr>
+              <a:t>工单实战 · 本次实跑结果</a:t>
+            </a:r>
+          </a:p>
+        </p:txBody>
+      </p:sp>
+      <p:sp>
+        <p:nvSpPr>
+          <p:cNvPr id="4" name="Rounded Rectangle 3"/>
+          <p:cNvSpPr/>
+          <p:nvPr/>
+        </p:nvSpPr>
+        <p:spPr>
+          <a:xfrm>
+            <a:off x="475488" y="475488"/>
+            <a:ext cx="1881187" cy="310896"/>
+          </a:xfrm>
+          <a:prstGeom prst="roundRect">
+            <a:avLst>
+              <a:gd name="adj" fmla="val 50000"/>
+            </a:avLst>
+          </a:prstGeom>
+          <a:solidFill>
+            <a:srgbClr val="C9A227"/>
+          </a:solidFill>
+          <a:ln>
+            <a:noFill/>
+          </a:ln>
+          <a:effectLst/>
+        </p:spPr>
+        <p:style>
+          <a:lnRef idx="1">
+            <a:schemeClr val="accent1"/>
+          </a:lnRef>
+          <a:fillRef idx="3">
+            <a:schemeClr val="accent1"/>
+          </a:fillRef>
+          <a:effectRef idx="2">
+            <a:schemeClr val="accent1"/>
+          </a:effectRef>
+          <a:fontRef idx="minor">
+            <a:schemeClr val="lt1"/>
+          </a:fontRef>
+        </p:style>
+        <p:txBody>
+          <a:bodyPr rtlCol="0" anchor="ctr"/>
+          <a:lstStyle/>
+          <a:p>
+            <a:pPr algn="ctr"/>
+          </a:p>
+        </p:txBody>
+      </p:sp>
+      <p:sp>
+        <p:nvSpPr>
+          <p:cNvPr id="5" name="TextBox 4"/>
+          <p:cNvSpPr txBox="1"/>
+          <p:nvPr/>
+        </p:nvSpPr>
+        <p:spPr>
+          <a:xfrm>
+            <a:off x="475488" y="475488"/>
+            <a:ext cx="1881187" cy="310896"/>
+          </a:xfrm>
+          <a:prstGeom prst="rect">
+            <a:avLst/>
+          </a:prstGeom>
+          <a:noFill/>
+        </p:spPr>
+        <p:txBody>
+          <a:bodyPr wrap="square" anchor="ctr" lIns="0" rIns="0" tIns="0" bIns="0">
+            <a:spAutoFit/>
+          </a:bodyPr>
+          <a:lstStyle/>
+          <a:p>
+            <a:pPr algn="ctr">
+              <a:lnSpc>
+                <a:spcPct val="114000"/>
+              </a:lnSpc>
+            </a:pPr>
+            <a:r>
+              <a:rPr sz="1050" b="1">
+                <a:solidFill>
+                  <a:srgbClr val="FFFFFF"/>
+                </a:solidFill>
+              </a:rPr>
+              <a:t>REAL RUN · 四档逐字实测</a:t>
+            </a:r>
+          </a:p>
+        </p:txBody>
+      </p:sp>
+      <p:sp>
+        <p:nvSpPr>
+          <p:cNvPr id="6" name="TextBox 5"/>
+          <p:cNvSpPr txBox="1"/>
+          <p:nvPr/>
+        </p:nvSpPr>
+        <p:spPr>
+          <a:xfrm>
+            <a:off x="475488" y="859536"/>
+            <a:ext cx="11237976" cy="502920"/>
+          </a:xfrm>
+          <a:prstGeom prst="rect">
+            <a:avLst/>
+          </a:prstGeom>
+          <a:noFill/>
+        </p:spPr>
+        <p:txBody>
+          <a:bodyPr wrap="square" anchor="t" lIns="0" rIns="0" tIns="0" bIns="0">
+            <a:spAutoFit/>
+          </a:bodyPr>
+          <a:lstStyle/>
+          <a:p>
+            <a:pPr algn="l">
+              <a:lnSpc>
+                <a:spcPct val="114000"/>
+              </a:lnSpc>
+            </a:pPr>
+            <a:r>
+              <a:rPr sz="2200" b="1">
+                <a:solidFill>
+                  <a:srgbClr val="1B2B28"/>
+                </a:solidFill>
+              </a:rPr>
+              <a:t>P1.1 p11_exercises：本次 D/C/B/A 四档实测</a:t>
+            </a:r>
+          </a:p>
+        </p:txBody>
+      </p:sp>
+      <p:sp>
+        <p:nvSpPr>
+          <p:cNvPr id="7" name="Rounded Rectangle 6"/>
+          <p:cNvSpPr/>
+          <p:nvPr/>
+        </p:nvSpPr>
+        <p:spPr>
+          <a:xfrm>
+            <a:off x="475488" y="1389888"/>
+            <a:ext cx="1234440" cy="27432"/>
+          </a:xfrm>
+          <a:prstGeom prst="roundRect">
+            <a:avLst>
+              <a:gd name="adj" fmla="val 50000"/>
+            </a:avLst>
+          </a:prstGeom>
+          <a:solidFill>
+            <a:srgbClr val="C9A227"/>
+          </a:solidFill>
+          <a:ln>
+            <a:noFill/>
+          </a:ln>
+          <a:effectLst/>
+        </p:spPr>
+        <p:style>
+          <a:lnRef idx="1">
+            <a:schemeClr val="accent1"/>
+          </a:lnRef>
+          <a:fillRef idx="3">
+            <a:schemeClr val="accent1"/>
+          </a:fillRef>
+          <a:effectRef idx="2">
+            <a:schemeClr val="accent1"/>
+          </a:effectRef>
+          <a:fontRef idx="minor">
+            <a:schemeClr val="lt1"/>
+          </a:fontRef>
+        </p:style>
+        <p:txBody>
+          <a:bodyPr rtlCol="0" anchor="ctr"/>
+          <a:lstStyle/>
+          <a:p>
+            <a:pPr algn="ctr"/>
+          </a:p>
+        </p:txBody>
+      </p:sp>
+      <p:sp>
+        <p:nvSpPr>
+          <p:cNvPr id="8" name="Rounded Rectangle 7"/>
+          <p:cNvSpPr/>
+          <p:nvPr/>
+        </p:nvSpPr>
+        <p:spPr>
+          <a:xfrm>
+            <a:off x="475488" y="6419088"/>
+            <a:ext cx="11237976" cy="10972"/>
+          </a:xfrm>
+          <a:prstGeom prst="roundRect">
+            <a:avLst>
+              <a:gd name="adj" fmla="val 50000"/>
+            </a:avLst>
+          </a:prstGeom>
+          <a:solidFill>
+            <a:srgbClr val="E4F1EE"/>
+          </a:solidFill>
+          <a:ln>
+            <a:noFill/>
+          </a:ln>
+          <a:effectLst/>
+        </p:spPr>
+        <p:style>
+          <a:lnRef idx="1">
+            <a:schemeClr val="accent1"/>
+          </a:lnRef>
+          <a:fillRef idx="3">
+            <a:schemeClr val="accent1"/>
+          </a:fillRef>
+          <a:effectRef idx="2">
+            <a:schemeClr val="accent1"/>
+          </a:effectRef>
+          <a:fontRef idx="minor">
+            <a:schemeClr val="lt1"/>
+          </a:fontRef>
+        </p:style>
+        <p:txBody>
+          <a:bodyPr rtlCol="0" anchor="ctr"/>
+          <a:lstStyle/>
+          <a:p>
+            <a:pPr algn="ctr"/>
+          </a:p>
+        </p:txBody>
+      </p:sp>
+      <p:sp>
+        <p:nvSpPr>
+          <p:cNvPr id="9" name="TextBox 8"/>
+          <p:cNvSpPr txBox="1"/>
+          <p:nvPr/>
+        </p:nvSpPr>
+        <p:spPr>
+          <a:xfrm>
+            <a:off x="475488" y="6455664"/>
+            <a:ext cx="7315200" cy="292608"/>
+          </a:xfrm>
+          <a:prstGeom prst="rect">
+            <a:avLst/>
+          </a:prstGeom>
+          <a:noFill/>
+        </p:spPr>
+        <p:txBody>
+          <a:bodyPr wrap="square" anchor="t" lIns="0" rIns="0" tIns="0" bIns="0">
+            <a:spAutoFit/>
+          </a:bodyPr>
+          <a:lstStyle/>
+          <a:p>
+            <a:pPr algn="l">
+              <a:lnSpc>
+                <a:spcPct val="114000"/>
+              </a:lnSpc>
+            </a:pPr>
+            <a:r>
+              <a:rPr sz="900" b="0">
+                <a:solidFill>
+                  <a:srgbClr val="5C6E6A"/>
+                </a:solidFill>
+              </a:rPr>
+              <a:t>两江智造集团 · Python程序设计（项目实战）</a:t>
+            </a:r>
+          </a:p>
+        </p:txBody>
+      </p:sp>
+      <p:sp>
+        <p:nvSpPr>
+          <p:cNvPr id="10" name="TextBox 9"/>
+          <p:cNvSpPr txBox="1"/>
+          <p:nvPr/>
+        </p:nvSpPr>
+        <p:spPr>
+          <a:xfrm>
+            <a:off x="10597896" y="6537960"/>
+            <a:ext cx="996696" cy="301752"/>
+          </a:xfrm>
+          <a:prstGeom prst="rect">
+            <a:avLst/>
+          </a:prstGeom>
+          <a:noFill/>
+        </p:spPr>
+        <p:txBody>
+          <a:bodyPr wrap="square" anchor="t" lIns="0" rIns="0" tIns="0" bIns="0">
+            <a:spAutoFit/>
+          </a:bodyPr>
+          <a:lstStyle/>
+          <a:p>
+            <a:pPr algn="r">
+              <a:lnSpc>
+                <a:spcPct val="114000"/>
+              </a:lnSpc>
+            </a:pPr>
+            <a:r>
+              <a:rPr sz="1000" b="0">
+                <a:solidFill>
+                  <a:srgbClr val="8A97B5"/>
+                </a:solidFill>
+              </a:rPr>
+              <a:t>51 / 69</a:t>
+            </a:r>
+          </a:p>
+        </p:txBody>
+      </p:sp>
+      <p:sp>
+        <p:nvSpPr>
+          <p:cNvPr id="11" name="Rounded Rectangle 10"/>
+          <p:cNvSpPr/>
+          <p:nvPr/>
+        </p:nvSpPr>
+        <p:spPr>
+          <a:xfrm>
+            <a:off x="475488" y="1554480"/>
+            <a:ext cx="11237976" cy="916686"/>
+          </a:xfrm>
+          <a:prstGeom prst="roundRect">
+            <a:avLst>
+              <a:gd name="adj" fmla="val 6000"/>
+            </a:avLst>
+          </a:prstGeom>
+          <a:solidFill>
+            <a:srgbClr val="FFFFFF"/>
+          </a:solidFill>
+          <a:ln w="9525">
+            <a:solidFill>
+              <a:srgbClr val="E4F1EE"/>
+            </a:solidFill>
+          </a:ln>
+          <a:effectLst/>
+        </p:spPr>
+        <p:style>
+          <a:lnRef idx="1">
+            <a:schemeClr val="accent1"/>
+          </a:lnRef>
+          <a:fillRef idx="3">
+            <a:schemeClr val="accent1"/>
+          </a:fillRef>
+          <a:effectRef idx="2">
+            <a:schemeClr val="accent1"/>
+          </a:effectRef>
+          <a:fontRef idx="minor">
+            <a:schemeClr val="lt1"/>
+          </a:fontRef>
+        </p:style>
+        <p:txBody>
+          <a:bodyPr rtlCol="0" anchor="ctr"/>
+          <a:lstStyle/>
+          <a:p>
+            <a:pPr algn="ctr"/>
+          </a:p>
+        </p:txBody>
+      </p:sp>
+      <p:sp>
+        <p:nvSpPr>
+          <p:cNvPr id="12" name="Rounded Rectangle 11"/>
+          <p:cNvSpPr/>
+          <p:nvPr/>
+        </p:nvSpPr>
+        <p:spPr>
+          <a:xfrm>
+            <a:off x="475488" y="1554480"/>
+            <a:ext cx="54864" cy="916686"/>
+          </a:xfrm>
+          <a:prstGeom prst="roundRect">
+            <a:avLst>
+              <a:gd name="adj" fmla="val 50000"/>
+            </a:avLst>
+          </a:prstGeom>
+          <a:solidFill>
+            <a:srgbClr val="5C6E6A"/>
+          </a:solidFill>
+          <a:ln>
+            <a:noFill/>
+          </a:ln>
+          <a:effectLst/>
+        </p:spPr>
+        <p:style>
+          <a:lnRef idx="1">
+            <a:schemeClr val="accent1"/>
+          </a:lnRef>
+          <a:fillRef idx="3">
+            <a:schemeClr val="accent1"/>
+          </a:fillRef>
+          <a:effectRef idx="2">
+            <a:schemeClr val="accent1"/>
+          </a:effectRef>
+          <a:fontRef idx="minor">
+            <a:schemeClr val="lt1"/>
+          </a:fontRef>
+        </p:style>
+        <p:txBody>
+          <a:bodyPr rtlCol="0" anchor="ctr"/>
+          <a:lstStyle/>
+          <a:p>
+            <a:pPr algn="ctr"/>
+          </a:p>
+        </p:txBody>
+      </p:sp>
+      <p:sp>
+        <p:nvSpPr>
+          <p:cNvPr id="13" name="Rounded Rectangle 12"/>
+          <p:cNvSpPr/>
+          <p:nvPr/>
+        </p:nvSpPr>
+        <p:spPr>
+          <a:xfrm>
+            <a:off x="621792" y="1636776"/>
+            <a:ext cx="237744" cy="237744"/>
+          </a:xfrm>
+          <a:prstGeom prst="roundRect">
+            <a:avLst>
+              <a:gd name="adj" fmla="val 28000"/>
+            </a:avLst>
+          </a:prstGeom>
+          <a:solidFill>
+            <a:srgbClr val="5C6E6A"/>
+          </a:solidFill>
+          <a:ln>
+            <a:noFill/>
+          </a:ln>
+          <a:effectLst/>
+        </p:spPr>
+        <p:style>
+          <a:lnRef idx="1">
+            <a:schemeClr val="accent1"/>
+          </a:lnRef>
+          <a:fillRef idx="3">
+            <a:schemeClr val="accent1"/>
+          </a:fillRef>
+          <a:effectRef idx="2">
+            <a:schemeClr val="accent1"/>
+          </a:effectRef>
+          <a:fontRef idx="minor">
+            <a:schemeClr val="lt1"/>
+          </a:fontRef>
+        </p:style>
+        <p:txBody>
+          <a:bodyPr rtlCol="0" anchor="ctr"/>
+          <a:lstStyle/>
+          <a:p>
+            <a:pPr algn="ctr"/>
+          </a:p>
+        </p:txBody>
+      </p:sp>
+      <p:sp>
+        <p:nvSpPr>
+          <p:cNvPr id="14" name="TextBox 13"/>
+          <p:cNvSpPr txBox="1"/>
+          <p:nvPr/>
+        </p:nvSpPr>
+        <p:spPr>
+          <a:xfrm>
+            <a:off x="621792" y="1636776"/>
+            <a:ext cx="237744" cy="237744"/>
+          </a:xfrm>
+          <a:prstGeom prst="rect">
+            <a:avLst/>
+          </a:prstGeom>
+          <a:noFill/>
+        </p:spPr>
+        <p:txBody>
+          <a:bodyPr wrap="square" anchor="ctr" lIns="0" rIns="0" tIns="0" bIns="0">
+            <a:spAutoFit/>
+          </a:bodyPr>
+          <a:lstStyle/>
+          <a:p>
+            <a:pPr algn="ctr">
+              <a:lnSpc>
+                <a:spcPct val="114000"/>
+              </a:lnSpc>
+            </a:pPr>
+            <a:r>
+              <a:rPr sz="1000" b="1">
+                <a:solidFill>
+                  <a:srgbClr val="FFFFFF"/>
+                </a:solidFill>
+              </a:rPr>
+              <a:t>D</a:t>
+            </a:r>
+          </a:p>
+        </p:txBody>
+      </p:sp>
+      <p:sp>
+        <p:nvSpPr>
+          <p:cNvPr id="15" name="TextBox 14"/>
+          <p:cNvSpPr txBox="1"/>
+          <p:nvPr/>
+        </p:nvSpPr>
+        <p:spPr>
+          <a:xfrm>
+            <a:off x="932688" y="1618488"/>
+            <a:ext cx="8778240" cy="274320"/>
+          </a:xfrm>
+          <a:prstGeom prst="rect">
+            <a:avLst/>
+          </a:prstGeom>
+          <a:noFill/>
+        </p:spPr>
+        <p:txBody>
+          <a:bodyPr wrap="square" anchor="ctr" lIns="0" rIns="0" tIns="0" bIns="0">
+            <a:spAutoFit/>
+          </a:bodyPr>
+          <a:lstStyle/>
+          <a:p>
+            <a:pPr algn="l">
+              <a:lnSpc>
+                <a:spcPct val="114000"/>
+              </a:lnSpc>
+            </a:pPr>
+            <a:r>
+              <a:rPr sz="1050" b="1">
+                <a:solidFill>
+                  <a:srgbClr val="1B2B28"/>
+                </a:solidFill>
+              </a:rPr>
+              <a:t>及格</a:t>
+            </a:r>
+            <a:r>
+              <a:rPr sz="850" b="0">
+                <a:solidFill>
+                  <a:srgbClr val="5C6E6A"/>
+                </a:solidFill>
+              </a:rPr>
+              <a:t>   验收口径：</a:t>
+            </a:r>
+            <a:r>
+              <a:rPr sz="850" b="0">
+                <a:solidFill>
+                  <a:srgbClr val="5C6E6A"/>
+                </a:solidFill>
+              </a:rPr>
+              <a:t>≥3题正确运行；PEP 8≥75%；有基础注释</a:t>
+            </a:r>
+          </a:p>
+        </p:txBody>
+      </p:sp>
+      <p:sp>
+        <p:nvSpPr>
+          <p:cNvPr id="16" name="Rounded Rectangle 15"/>
+          <p:cNvSpPr/>
+          <p:nvPr/>
+        </p:nvSpPr>
+        <p:spPr>
+          <a:xfrm>
+            <a:off x="11131803" y="1645920"/>
+            <a:ext cx="453644" cy="237744"/>
+          </a:xfrm>
+          <a:prstGeom prst="roundRect">
+            <a:avLst>
+              <a:gd name="adj" fmla="val 50000"/>
+            </a:avLst>
+          </a:prstGeom>
+          <a:solidFill>
+            <a:srgbClr val="0B5E54"/>
+          </a:solidFill>
+          <a:ln>
+            <a:noFill/>
+          </a:ln>
+          <a:effectLst/>
+        </p:spPr>
+        <p:style>
+          <a:lnRef idx="1">
+            <a:schemeClr val="accent1"/>
+          </a:lnRef>
+          <a:fillRef idx="3">
+            <a:schemeClr val="accent1"/>
+          </a:fillRef>
+          <a:effectRef idx="2">
+            <a:schemeClr val="accent1"/>
+          </a:effectRef>
+          <a:fontRef idx="minor">
+            <a:schemeClr val="lt1"/>
+          </a:fontRef>
+        </p:style>
+        <p:txBody>
+          <a:bodyPr rtlCol="0" anchor="ctr"/>
+          <a:lstStyle/>
+          <a:p>
+            <a:pPr algn="ctr"/>
+          </a:p>
+        </p:txBody>
+      </p:sp>
+      <p:sp>
+        <p:nvSpPr>
+          <p:cNvPr id="17" name="TextBox 16"/>
+          <p:cNvSpPr txBox="1"/>
+          <p:nvPr/>
+        </p:nvSpPr>
+        <p:spPr>
+          <a:xfrm>
+            <a:off x="11131803" y="1645920"/>
+            <a:ext cx="453644" cy="237744"/>
+          </a:xfrm>
+          <a:prstGeom prst="rect">
+            <a:avLst/>
+          </a:prstGeom>
+          <a:noFill/>
+        </p:spPr>
+        <p:txBody>
+          <a:bodyPr wrap="square" anchor="ctr" lIns="0" rIns="0" tIns="0" bIns="0">
+            <a:spAutoFit/>
+          </a:bodyPr>
+          <a:lstStyle/>
+          <a:p>
+            <a:pPr algn="ctr">
+              <a:lnSpc>
+                <a:spcPct val="114000"/>
+              </a:lnSpc>
+            </a:pPr>
+            <a:r>
+              <a:rPr sz="850" b="1">
+                <a:solidFill>
+                  <a:srgbClr val="FFFFFF"/>
+                </a:solidFill>
+              </a:rPr>
+              <a:t>达标</a:t>
+            </a:r>
+          </a:p>
+        </p:txBody>
+      </p:sp>
+      <p:sp>
+        <p:nvSpPr>
+          <p:cNvPr id="18" name="TextBox 17"/>
+          <p:cNvSpPr txBox="1"/>
+          <p:nvPr/>
+        </p:nvSpPr>
+        <p:spPr>
+          <a:xfrm>
+            <a:off x="932688" y="1901952"/>
+            <a:ext cx="10671047" cy="514350"/>
+          </a:xfrm>
+          <a:prstGeom prst="rect">
+            <a:avLst/>
+          </a:prstGeom>
+          <a:noFill/>
+        </p:spPr>
+        <p:txBody>
+          <a:bodyPr wrap="square" anchor="t" lIns="0" rIns="0" tIns="0" bIns="0">
+            <a:spAutoFit/>
+          </a:bodyPr>
+          <a:lstStyle/>
+          <a:p>
+            <a:pPr algn="l">
+              <a:lnSpc>
+                <a:spcPct val="114000"/>
+              </a:lnSpc>
+            </a:pPr>
+            <a:r>
+              <a:rPr sz="950" b="0">
+                <a:solidFill>
+                  <a:srgbClr val="1B2B28"/>
+                </a:solidFill>
+              </a:rPr>
+              <a:t>正确 5/5 题｜PEP 8 子集达标率 100.0%（检查项通过 4794/4795）≥ 75.0%｜有 docstring 的公开函数 53/53、模块 13/13</a:t>
+            </a:r>
+          </a:p>
+        </p:txBody>
+      </p:sp>
+      <p:sp>
+        <p:nvSpPr>
+          <p:cNvPr id="19" name="Rounded Rectangle 18"/>
+          <p:cNvSpPr/>
+          <p:nvPr/>
+        </p:nvSpPr>
+        <p:spPr>
+          <a:xfrm>
+            <a:off x="475488" y="2535174"/>
+            <a:ext cx="11237976" cy="916686"/>
+          </a:xfrm>
+          <a:prstGeom prst="roundRect">
+            <a:avLst>
+              <a:gd name="adj" fmla="val 6000"/>
+            </a:avLst>
+          </a:prstGeom>
+          <a:solidFill>
+            <a:srgbClr val="FFFFFF"/>
+          </a:solidFill>
+          <a:ln w="9525">
+            <a:solidFill>
+              <a:srgbClr val="E4F1EE"/>
+            </a:solidFill>
+          </a:ln>
+          <a:effectLst/>
+        </p:spPr>
+        <p:style>
+          <a:lnRef idx="1">
+            <a:schemeClr val="accent1"/>
+          </a:lnRef>
+          <a:fillRef idx="3">
+            <a:schemeClr val="accent1"/>
+          </a:fillRef>
+          <a:effectRef idx="2">
+            <a:schemeClr val="accent1"/>
+          </a:effectRef>
+          <a:fontRef idx="minor">
+            <a:schemeClr val="lt1"/>
+          </a:fontRef>
+        </p:style>
+        <p:txBody>
+          <a:bodyPr rtlCol="0" anchor="ctr"/>
+          <a:lstStyle/>
+          <a:p>
+            <a:pPr algn="ctr"/>
+          </a:p>
+        </p:txBody>
+      </p:sp>
+      <p:sp>
+        <p:nvSpPr>
+          <p:cNvPr id="20" name="Rounded Rectangle 19"/>
+          <p:cNvSpPr/>
+          <p:nvPr/>
+        </p:nvSpPr>
+        <p:spPr>
+          <a:xfrm>
+            <a:off x="475488" y="2535174"/>
+            <a:ext cx="54864" cy="916686"/>
+          </a:xfrm>
+          <a:prstGeom prst="roundRect">
+            <a:avLst>
+              <a:gd name="adj" fmla="val 50000"/>
+            </a:avLst>
+          </a:prstGeom>
+          <a:solidFill>
+            <a:srgbClr val="157A6D"/>
+          </a:solidFill>
+          <a:ln>
+            <a:noFill/>
+          </a:ln>
+          <a:effectLst/>
+        </p:spPr>
+        <p:style>
+          <a:lnRef idx="1">
+            <a:schemeClr val="accent1"/>
+          </a:lnRef>
+          <a:fillRef idx="3">
+            <a:schemeClr val="accent1"/>
+          </a:fillRef>
+          <a:effectRef idx="2">
+            <a:schemeClr val="accent1"/>
+          </a:effectRef>
+          <a:fontRef idx="minor">
+            <a:schemeClr val="lt1"/>
+          </a:fontRef>
+        </p:style>
+        <p:txBody>
+          <a:bodyPr rtlCol="0" anchor="ctr"/>
+          <a:lstStyle/>
+          <a:p>
+            <a:pPr algn="ctr"/>
+          </a:p>
+        </p:txBody>
+      </p:sp>
+      <p:sp>
+        <p:nvSpPr>
+          <p:cNvPr id="21" name="Rounded Rectangle 20"/>
+          <p:cNvSpPr/>
+          <p:nvPr/>
+        </p:nvSpPr>
+        <p:spPr>
+          <a:xfrm>
+            <a:off x="621792" y="2617470"/>
+            <a:ext cx="237744" cy="237744"/>
+          </a:xfrm>
+          <a:prstGeom prst="roundRect">
+            <a:avLst>
+              <a:gd name="adj" fmla="val 28000"/>
+            </a:avLst>
+          </a:prstGeom>
+          <a:solidFill>
+            <a:srgbClr val="157A6D"/>
+          </a:solidFill>
+          <a:ln>
+            <a:noFill/>
+          </a:ln>
+          <a:effectLst/>
+        </p:spPr>
+        <p:style>
+          <a:lnRef idx="1">
+            <a:schemeClr val="accent1"/>
+          </a:lnRef>
+          <a:fillRef idx="3">
+            <a:schemeClr val="accent1"/>
+          </a:fillRef>
+          <a:effectRef idx="2">
+            <a:schemeClr val="accent1"/>
+          </a:effectRef>
+          <a:fontRef idx="minor">
+            <a:schemeClr val="lt1"/>
+          </a:fontRef>
+        </p:style>
+        <p:txBody>
+          <a:bodyPr rtlCol="0" anchor="ctr"/>
+          <a:lstStyle/>
+          <a:p>
+            <a:pPr algn="ctr"/>
+          </a:p>
+        </p:txBody>
+      </p:sp>
+      <p:sp>
+        <p:nvSpPr>
+          <p:cNvPr id="22" name="TextBox 21"/>
+          <p:cNvSpPr txBox="1"/>
+          <p:nvPr/>
+        </p:nvSpPr>
+        <p:spPr>
+          <a:xfrm>
+            <a:off x="621792" y="2617470"/>
+            <a:ext cx="237744" cy="237744"/>
+          </a:xfrm>
+          <a:prstGeom prst="rect">
+            <a:avLst/>
+          </a:prstGeom>
+          <a:noFill/>
+        </p:spPr>
+        <p:txBody>
+          <a:bodyPr wrap="square" anchor="ctr" lIns="0" rIns="0" tIns="0" bIns="0">
+            <a:spAutoFit/>
+          </a:bodyPr>
+          <a:lstStyle/>
+          <a:p>
+            <a:pPr algn="ctr">
+              <a:lnSpc>
+                <a:spcPct val="114000"/>
+              </a:lnSpc>
+            </a:pPr>
+            <a:r>
+              <a:rPr sz="1000" b="1">
+                <a:solidFill>
+                  <a:srgbClr val="FFFFFF"/>
+                </a:solidFill>
+              </a:rPr>
+              <a:t>C</a:t>
+            </a:r>
+          </a:p>
+        </p:txBody>
+      </p:sp>
+      <p:sp>
+        <p:nvSpPr>
+          <p:cNvPr id="23" name="TextBox 22"/>
+          <p:cNvSpPr txBox="1"/>
+          <p:nvPr/>
+        </p:nvSpPr>
+        <p:spPr>
+          <a:xfrm>
+            <a:off x="932688" y="2599182"/>
+            <a:ext cx="8778240" cy="274320"/>
+          </a:xfrm>
+          <a:prstGeom prst="rect">
+            <a:avLst/>
+          </a:prstGeom>
+          <a:noFill/>
+        </p:spPr>
+        <p:txBody>
+          <a:bodyPr wrap="square" anchor="ctr" lIns="0" rIns="0" tIns="0" bIns="0">
+            <a:spAutoFit/>
+          </a:bodyPr>
+          <a:lstStyle/>
+          <a:p>
+            <a:pPr algn="l">
+              <a:lnSpc>
+                <a:spcPct val="114000"/>
+              </a:lnSpc>
+            </a:pPr>
+            <a:r>
+              <a:rPr sz="1050" b="1">
+                <a:solidFill>
+                  <a:srgbClr val="1B2B28"/>
+                </a:solidFill>
+              </a:rPr>
+              <a:t>良好</a:t>
+            </a:r>
+            <a:r>
+              <a:rPr sz="850" b="0">
+                <a:solidFill>
+                  <a:srgbClr val="5C6E6A"/>
+                </a:solidFill>
+              </a:rPr>
+              <a:t>   验收口径：</a:t>
+            </a:r>
+            <a:r>
+              <a:rPr sz="850" b="0">
+                <a:solidFill>
+                  <a:srgbClr val="5C6E6A"/>
+                </a:solidFill>
+              </a:rPr>
+              <a:t>4题；命名有意义</a:t>
+            </a:r>
+          </a:p>
+        </p:txBody>
+      </p:sp>
+      <p:sp>
+        <p:nvSpPr>
+          <p:cNvPr id="24" name="Rounded Rectangle 23"/>
+          <p:cNvSpPr/>
+          <p:nvPr/>
+        </p:nvSpPr>
+        <p:spPr>
+          <a:xfrm>
+            <a:off x="11131803" y="2626614"/>
+            <a:ext cx="453644" cy="237744"/>
+          </a:xfrm>
+          <a:prstGeom prst="roundRect">
+            <a:avLst>
+              <a:gd name="adj" fmla="val 50000"/>
+            </a:avLst>
+          </a:prstGeom>
+          <a:solidFill>
+            <a:srgbClr val="0B5E54"/>
+          </a:solidFill>
+          <a:ln>
+            <a:noFill/>
+          </a:ln>
+          <a:effectLst/>
+        </p:spPr>
+        <p:style>
+          <a:lnRef idx="1">
+            <a:schemeClr val="accent1"/>
+          </a:lnRef>
+          <a:fillRef idx="3">
+            <a:schemeClr val="accent1"/>
+          </a:fillRef>
+          <a:effectRef idx="2">
+            <a:schemeClr val="accent1"/>
+          </a:effectRef>
+          <a:fontRef idx="minor">
+            <a:schemeClr val="lt1"/>
+          </a:fontRef>
+        </p:style>
+        <p:txBody>
+          <a:bodyPr rtlCol="0" anchor="ctr"/>
+          <a:lstStyle/>
+          <a:p>
+            <a:pPr algn="ctr"/>
+          </a:p>
+        </p:txBody>
+      </p:sp>
+      <p:sp>
+        <p:nvSpPr>
+          <p:cNvPr id="25" name="TextBox 24"/>
+          <p:cNvSpPr txBox="1"/>
+          <p:nvPr/>
+        </p:nvSpPr>
+        <p:spPr>
+          <a:xfrm>
+            <a:off x="11131803" y="2626614"/>
+            <a:ext cx="453644" cy="237744"/>
+          </a:xfrm>
+          <a:prstGeom prst="rect">
+            <a:avLst/>
+          </a:prstGeom>
+          <a:noFill/>
+        </p:spPr>
+        <p:txBody>
+          <a:bodyPr wrap="square" anchor="ctr" lIns="0" rIns="0" tIns="0" bIns="0">
+            <a:spAutoFit/>
+          </a:bodyPr>
+          <a:lstStyle/>
+          <a:p>
+            <a:pPr algn="ctr">
+              <a:lnSpc>
+                <a:spcPct val="114000"/>
+              </a:lnSpc>
+            </a:pPr>
+            <a:r>
+              <a:rPr sz="850" b="1">
+                <a:solidFill>
+                  <a:srgbClr val="FFFFFF"/>
+                </a:solidFill>
+              </a:rPr>
+              <a:t>达标</a:t>
+            </a:r>
+          </a:p>
+        </p:txBody>
+      </p:sp>
+      <p:sp>
+        <p:nvSpPr>
+          <p:cNvPr id="26" name="TextBox 25"/>
+          <p:cNvSpPr txBox="1"/>
+          <p:nvPr/>
+        </p:nvSpPr>
+        <p:spPr>
+          <a:xfrm>
+            <a:off x="932688" y="2882646"/>
+            <a:ext cx="10671047" cy="514350"/>
+          </a:xfrm>
+          <a:prstGeom prst="rect">
+            <a:avLst/>
+          </a:prstGeom>
+          <a:noFill/>
+        </p:spPr>
+        <p:txBody>
+          <a:bodyPr wrap="square" anchor="t" lIns="0" rIns="0" tIns="0" bIns="0">
+            <a:spAutoFit/>
+          </a:bodyPr>
+          <a:lstStyle/>
+          <a:p>
+            <a:pPr algn="l">
+              <a:lnSpc>
+                <a:spcPct val="114000"/>
+              </a:lnSpc>
+            </a:pPr>
+            <a:r>
+              <a:rPr sz="950" b="0">
+                <a:solidFill>
+                  <a:srgbClr val="1B2B28"/>
+                </a:solidFill>
+              </a:rPr>
+              <a:t>第4题 正确、正确 5/5（线 ≥4）｜命名有意义达标率 100.0%（合格 72/72）≥ 90.0%</a:t>
+            </a:r>
+          </a:p>
+        </p:txBody>
+      </p:sp>
+      <p:sp>
+        <p:nvSpPr>
+          <p:cNvPr id="27" name="Rounded Rectangle 26"/>
+          <p:cNvSpPr/>
+          <p:nvPr/>
+        </p:nvSpPr>
+        <p:spPr>
+          <a:xfrm>
+            <a:off x="475488" y="3515868"/>
+            <a:ext cx="11237976" cy="916686"/>
+          </a:xfrm>
+          <a:prstGeom prst="roundRect">
+            <a:avLst>
+              <a:gd name="adj" fmla="val 6000"/>
+            </a:avLst>
+          </a:prstGeom>
+          <a:solidFill>
+            <a:srgbClr val="FFFFFF"/>
+          </a:solidFill>
+          <a:ln w="9525">
+            <a:solidFill>
+              <a:srgbClr val="E4F1EE"/>
+            </a:solidFill>
+          </a:ln>
+          <a:effectLst/>
+        </p:spPr>
+        <p:style>
+          <a:lnRef idx="1">
+            <a:schemeClr val="accent1"/>
+          </a:lnRef>
+          <a:fillRef idx="3">
+            <a:schemeClr val="accent1"/>
+          </a:fillRef>
+          <a:effectRef idx="2">
+            <a:schemeClr val="accent1"/>
+          </a:effectRef>
+          <a:fontRef idx="minor">
+            <a:schemeClr val="lt1"/>
+          </a:fontRef>
+        </p:style>
+        <p:txBody>
+          <a:bodyPr rtlCol="0" anchor="ctr"/>
+          <a:lstStyle/>
+          <a:p>
+            <a:pPr algn="ctr"/>
+          </a:p>
+        </p:txBody>
+      </p:sp>
+      <p:sp>
+        <p:nvSpPr>
+          <p:cNvPr id="28" name="Rounded Rectangle 27"/>
+          <p:cNvSpPr/>
+          <p:nvPr/>
+        </p:nvSpPr>
+        <p:spPr>
+          <a:xfrm>
+            <a:off x="475488" y="3515868"/>
+            <a:ext cx="54864" cy="916686"/>
+          </a:xfrm>
+          <a:prstGeom prst="roundRect">
+            <a:avLst>
+              <a:gd name="adj" fmla="val 50000"/>
+            </a:avLst>
+          </a:prstGeom>
+          <a:solidFill>
+            <a:srgbClr val="0B5E54"/>
+          </a:solidFill>
+          <a:ln>
+            <a:noFill/>
+          </a:ln>
+          <a:effectLst/>
+        </p:spPr>
+        <p:style>
+          <a:lnRef idx="1">
+            <a:schemeClr val="accent1"/>
+          </a:lnRef>
+          <a:fillRef idx="3">
+            <a:schemeClr val="accent1"/>
+          </a:fillRef>
+          <a:effectRef idx="2">
+            <a:schemeClr val="accent1"/>
+          </a:effectRef>
+          <a:fontRef idx="minor">
+            <a:schemeClr val="lt1"/>
+          </a:fontRef>
+        </p:style>
+        <p:txBody>
+          <a:bodyPr rtlCol="0" anchor="ctr"/>
+          <a:lstStyle/>
+          <a:p>
+            <a:pPr algn="ctr"/>
+          </a:p>
+        </p:txBody>
+      </p:sp>
+      <p:sp>
+        <p:nvSpPr>
+          <p:cNvPr id="29" name="Rounded Rectangle 28"/>
+          <p:cNvSpPr/>
+          <p:nvPr/>
+        </p:nvSpPr>
+        <p:spPr>
+          <a:xfrm>
+            <a:off x="621792" y="3598163"/>
+            <a:ext cx="237744" cy="237744"/>
+          </a:xfrm>
+          <a:prstGeom prst="roundRect">
+            <a:avLst>
+              <a:gd name="adj" fmla="val 28000"/>
+            </a:avLst>
+          </a:prstGeom>
+          <a:solidFill>
+            <a:srgbClr val="0B5E54"/>
+          </a:solidFill>
+          <a:ln>
+            <a:noFill/>
+          </a:ln>
+          <a:effectLst/>
+        </p:spPr>
+        <p:style>
+          <a:lnRef idx="1">
+            <a:schemeClr val="accent1"/>
+          </a:lnRef>
+          <a:fillRef idx="3">
+            <a:schemeClr val="accent1"/>
+          </a:fillRef>
+          <a:effectRef idx="2">
+            <a:schemeClr val="accent1"/>
+          </a:effectRef>
+          <a:fontRef idx="minor">
+            <a:schemeClr val="lt1"/>
+          </a:fontRef>
+        </p:style>
+        <p:txBody>
+          <a:bodyPr rtlCol="0" anchor="ctr"/>
+          <a:lstStyle/>
+          <a:p>
+            <a:pPr algn="ctr"/>
+          </a:p>
+        </p:txBody>
+      </p:sp>
+      <p:sp>
+        <p:nvSpPr>
+          <p:cNvPr id="30" name="TextBox 29"/>
+          <p:cNvSpPr txBox="1"/>
+          <p:nvPr/>
+        </p:nvSpPr>
+        <p:spPr>
+          <a:xfrm>
+            <a:off x="621792" y="3598163"/>
+            <a:ext cx="237744" cy="237744"/>
+          </a:xfrm>
+          <a:prstGeom prst="rect">
+            <a:avLst/>
+          </a:prstGeom>
+          <a:noFill/>
+        </p:spPr>
+        <p:txBody>
+          <a:bodyPr wrap="square" anchor="ctr" lIns="0" rIns="0" tIns="0" bIns="0">
+            <a:spAutoFit/>
+          </a:bodyPr>
+          <a:lstStyle/>
+          <a:p>
+            <a:pPr algn="ctr">
+              <a:lnSpc>
+                <a:spcPct val="114000"/>
+              </a:lnSpc>
+            </a:pPr>
+            <a:r>
+              <a:rPr sz="1000" b="1">
+                <a:solidFill>
+                  <a:srgbClr val="FFFFFF"/>
+                </a:solidFill>
+              </a:rPr>
+              <a:t>B</a:t>
+            </a:r>
+          </a:p>
+        </p:txBody>
+      </p:sp>
+      <p:sp>
+        <p:nvSpPr>
+          <p:cNvPr id="31" name="TextBox 30"/>
+          <p:cNvSpPr txBox="1"/>
+          <p:nvPr/>
+        </p:nvSpPr>
+        <p:spPr>
+          <a:xfrm>
+            <a:off x="932688" y="3579875"/>
+            <a:ext cx="8778240" cy="274320"/>
+          </a:xfrm>
+          <a:prstGeom prst="rect">
+            <a:avLst/>
+          </a:prstGeom>
+          <a:noFill/>
+        </p:spPr>
+        <p:txBody>
+          <a:bodyPr wrap="square" anchor="ctr" lIns="0" rIns="0" tIns="0" bIns="0">
+            <a:spAutoFit/>
+          </a:bodyPr>
+          <a:lstStyle/>
+          <a:p>
+            <a:pPr algn="l">
+              <a:lnSpc>
+                <a:spcPct val="114000"/>
+              </a:lnSpc>
+            </a:pPr>
+            <a:r>
+              <a:rPr sz="1050" b="1">
+                <a:solidFill>
+                  <a:srgbClr val="1B2B28"/>
+                </a:solidFill>
+              </a:rPr>
+              <a:t>优秀</a:t>
+            </a:r>
+            <a:r>
+              <a:rPr sz="850" b="0">
+                <a:solidFill>
+                  <a:srgbClr val="5C6E6A"/>
+                </a:solidFill>
+              </a:rPr>
+              <a:t>   验收口径：</a:t>
+            </a:r>
+            <a:r>
+              <a:rPr sz="850" b="0">
+                <a:solidFill>
+                  <a:srgbClr val="5C6E6A"/>
+                </a:solidFill>
+              </a:rPr>
+              <a:t>5题全对；PEP 8≥85%；结构清晰</a:t>
+            </a:r>
+          </a:p>
+        </p:txBody>
+      </p:sp>
+      <p:sp>
+        <p:nvSpPr>
+          <p:cNvPr id="32" name="Rounded Rectangle 31"/>
+          <p:cNvSpPr/>
+          <p:nvPr/>
+        </p:nvSpPr>
+        <p:spPr>
+          <a:xfrm>
+            <a:off x="11131803" y="3607308"/>
+            <a:ext cx="453644" cy="237744"/>
+          </a:xfrm>
+          <a:prstGeom prst="roundRect">
+            <a:avLst>
+              <a:gd name="adj" fmla="val 50000"/>
+            </a:avLst>
+          </a:prstGeom>
+          <a:solidFill>
+            <a:srgbClr val="0B5E54"/>
+          </a:solidFill>
+          <a:ln>
+            <a:noFill/>
+          </a:ln>
+          <a:effectLst/>
+        </p:spPr>
+        <p:style>
+          <a:lnRef idx="1">
+            <a:schemeClr val="accent1"/>
+          </a:lnRef>
+          <a:fillRef idx="3">
+            <a:schemeClr val="accent1"/>
+          </a:fillRef>
+          <a:effectRef idx="2">
+            <a:schemeClr val="accent1"/>
+          </a:effectRef>
+          <a:fontRef idx="minor">
+            <a:schemeClr val="lt1"/>
+          </a:fontRef>
+        </p:style>
+        <p:txBody>
+          <a:bodyPr rtlCol="0" anchor="ctr"/>
+          <a:lstStyle/>
+          <a:p>
+            <a:pPr algn="ctr"/>
+          </a:p>
+        </p:txBody>
+      </p:sp>
+      <p:sp>
+        <p:nvSpPr>
+          <p:cNvPr id="33" name="TextBox 32"/>
+          <p:cNvSpPr txBox="1"/>
+          <p:nvPr/>
+        </p:nvSpPr>
+        <p:spPr>
+          <a:xfrm>
+            <a:off x="11131803" y="3607308"/>
+            <a:ext cx="453644" cy="237744"/>
+          </a:xfrm>
+          <a:prstGeom prst="rect">
+            <a:avLst/>
+          </a:prstGeom>
+          <a:noFill/>
+        </p:spPr>
+        <p:txBody>
+          <a:bodyPr wrap="square" anchor="ctr" lIns="0" rIns="0" tIns="0" bIns="0">
+            <a:spAutoFit/>
+          </a:bodyPr>
+          <a:lstStyle/>
+          <a:p>
+            <a:pPr algn="ctr">
+              <a:lnSpc>
+                <a:spcPct val="114000"/>
+              </a:lnSpc>
+            </a:pPr>
+            <a:r>
+              <a:rPr sz="850" b="1">
+                <a:solidFill>
+                  <a:srgbClr val="FFFFFF"/>
+                </a:solidFill>
+              </a:rPr>
+              <a:t>达标</a:t>
+            </a:r>
+          </a:p>
+        </p:txBody>
+      </p:sp>
+      <p:sp>
+        <p:nvSpPr>
+          <p:cNvPr id="34" name="TextBox 33"/>
+          <p:cNvSpPr txBox="1"/>
+          <p:nvPr/>
+        </p:nvSpPr>
+        <p:spPr>
+          <a:xfrm>
+            <a:off x="932688" y="3863339"/>
+            <a:ext cx="10671047" cy="514350"/>
+          </a:xfrm>
+          <a:prstGeom prst="rect">
+            <a:avLst/>
+          </a:prstGeom>
+          <a:noFill/>
+        </p:spPr>
+        <p:txBody>
+          <a:bodyPr wrap="square" anchor="t" lIns="0" rIns="0" tIns="0" bIns="0">
+            <a:spAutoFit/>
+          </a:bodyPr>
+          <a:lstStyle/>
+          <a:p>
+            <a:pPr algn="l">
+              <a:lnSpc>
+                <a:spcPct val="114000"/>
+              </a:lnSpc>
+            </a:pPr>
+            <a:r>
+              <a:rPr sz="950" b="0">
+                <a:solidFill>
+                  <a:srgbClr val="1B2B28"/>
+                </a:solidFill>
+              </a:rPr>
+              <a:t>正确 5/5｜PEP 8 子集达标率 100.0%（检查项通过 4794/4795）≥ 85.0%｜结构：四件套 4/4、一题一函数 5/5、src 模块 docstring 12/12</a:t>
+            </a:r>
+          </a:p>
+        </p:txBody>
+      </p:sp>
+      <p:sp>
+        <p:nvSpPr>
+          <p:cNvPr id="35" name="Rounded Rectangle 34"/>
+          <p:cNvSpPr/>
+          <p:nvPr/>
+        </p:nvSpPr>
+        <p:spPr>
+          <a:xfrm>
+            <a:off x="475488" y="4496562"/>
+            <a:ext cx="11237976" cy="916686"/>
+          </a:xfrm>
+          <a:prstGeom prst="roundRect">
+            <a:avLst>
+              <a:gd name="adj" fmla="val 6000"/>
+            </a:avLst>
+          </a:prstGeom>
+          <a:solidFill>
+            <a:srgbClr val="FFFFFF"/>
+          </a:solidFill>
+          <a:ln w="9525">
+            <a:solidFill>
+              <a:srgbClr val="E4F1EE"/>
+            </a:solidFill>
+          </a:ln>
+          <a:effectLst/>
+        </p:spPr>
+        <p:style>
+          <a:lnRef idx="1">
+            <a:schemeClr val="accent1"/>
+          </a:lnRef>
+          <a:fillRef idx="3">
+            <a:schemeClr val="accent1"/>
+          </a:fillRef>
+          <a:effectRef idx="2">
+            <a:schemeClr val="accent1"/>
+          </a:effectRef>
+          <a:fontRef idx="minor">
+            <a:schemeClr val="lt1"/>
+          </a:fontRef>
+        </p:style>
+        <p:txBody>
+          <a:bodyPr rtlCol="0" anchor="ctr"/>
+          <a:lstStyle/>
+          <a:p>
+            <a:pPr algn="ctr"/>
+          </a:p>
+        </p:txBody>
+      </p:sp>
+      <p:sp>
+        <p:nvSpPr>
+          <p:cNvPr id="36" name="Rounded Rectangle 35"/>
+          <p:cNvSpPr/>
+          <p:nvPr/>
+        </p:nvSpPr>
+        <p:spPr>
+          <a:xfrm>
+            <a:off x="475488" y="4496562"/>
+            <a:ext cx="54864" cy="916686"/>
+          </a:xfrm>
+          <a:prstGeom prst="roundRect">
+            <a:avLst>
+              <a:gd name="adj" fmla="val 50000"/>
+            </a:avLst>
+          </a:prstGeom>
+          <a:solidFill>
+            <a:srgbClr val="C9A227"/>
+          </a:solidFill>
+          <a:ln>
+            <a:noFill/>
+          </a:ln>
+          <a:effectLst/>
+        </p:spPr>
+        <p:style>
+          <a:lnRef idx="1">
+            <a:schemeClr val="accent1"/>
+          </a:lnRef>
+          <a:fillRef idx="3">
+            <a:schemeClr val="accent1"/>
+          </a:fillRef>
+          <a:effectRef idx="2">
+            <a:schemeClr val="accent1"/>
+          </a:effectRef>
+          <a:fontRef idx="minor">
+            <a:schemeClr val="lt1"/>
+          </a:fontRef>
+        </p:style>
+        <p:txBody>
+          <a:bodyPr rtlCol="0" anchor="ctr"/>
+          <a:lstStyle/>
+          <a:p>
+            <a:pPr algn="ctr"/>
+          </a:p>
+        </p:txBody>
+      </p:sp>
+      <p:sp>
+        <p:nvSpPr>
+          <p:cNvPr id="37" name="Rounded Rectangle 36"/>
+          <p:cNvSpPr/>
+          <p:nvPr/>
+        </p:nvSpPr>
+        <p:spPr>
+          <a:xfrm>
+            <a:off x="621792" y="4578857"/>
+            <a:ext cx="237744" cy="237744"/>
+          </a:xfrm>
+          <a:prstGeom prst="roundRect">
+            <a:avLst>
+              <a:gd name="adj" fmla="val 28000"/>
+            </a:avLst>
+          </a:prstGeom>
+          <a:solidFill>
+            <a:srgbClr val="C9A227"/>
+          </a:solidFill>
+          <a:ln>
+            <a:noFill/>
+          </a:ln>
+          <a:effectLst/>
+        </p:spPr>
+        <p:style>
+          <a:lnRef idx="1">
+            <a:schemeClr val="accent1"/>
+          </a:lnRef>
+          <a:fillRef idx="3">
+            <a:schemeClr val="accent1"/>
+          </a:fillRef>
+          <a:effectRef idx="2">
+            <a:schemeClr val="accent1"/>
+          </a:effectRef>
+          <a:fontRef idx="minor">
+            <a:schemeClr val="lt1"/>
+          </a:fontRef>
+        </p:style>
+        <p:txBody>
+          <a:bodyPr rtlCol="0" anchor="ctr"/>
+          <a:lstStyle/>
+          <a:p>
+            <a:pPr algn="ctr"/>
+          </a:p>
+        </p:txBody>
+      </p:sp>
+      <p:sp>
+        <p:nvSpPr>
+          <p:cNvPr id="38" name="TextBox 37"/>
+          <p:cNvSpPr txBox="1"/>
+          <p:nvPr/>
+        </p:nvSpPr>
+        <p:spPr>
+          <a:xfrm>
+            <a:off x="621792" y="4578857"/>
+            <a:ext cx="237744" cy="237744"/>
+          </a:xfrm>
+          <a:prstGeom prst="rect">
+            <a:avLst/>
+          </a:prstGeom>
+          <a:noFill/>
+        </p:spPr>
+        <p:txBody>
+          <a:bodyPr wrap="square" anchor="ctr" lIns="0" rIns="0" tIns="0" bIns="0">
+            <a:spAutoFit/>
+          </a:bodyPr>
+          <a:lstStyle/>
+          <a:p>
+            <a:pPr algn="ctr">
+              <a:lnSpc>
+                <a:spcPct val="114000"/>
+              </a:lnSpc>
+            </a:pPr>
+            <a:r>
+              <a:rPr sz="1000" b="1">
+                <a:solidFill>
+                  <a:srgbClr val="FFFFFF"/>
+                </a:solidFill>
+              </a:rPr>
+              <a:t>A</a:t>
+            </a:r>
+          </a:p>
+        </p:txBody>
+      </p:sp>
+      <p:sp>
+        <p:nvSpPr>
+          <p:cNvPr id="39" name="TextBox 38"/>
+          <p:cNvSpPr txBox="1"/>
+          <p:nvPr/>
+        </p:nvSpPr>
+        <p:spPr>
+          <a:xfrm>
+            <a:off x="932688" y="4560570"/>
+            <a:ext cx="8778240" cy="274320"/>
+          </a:xfrm>
+          <a:prstGeom prst="rect">
+            <a:avLst/>
+          </a:prstGeom>
+          <a:noFill/>
+        </p:spPr>
+        <p:txBody>
+          <a:bodyPr wrap="square" anchor="ctr" lIns="0" rIns="0" tIns="0" bIns="0">
+            <a:spAutoFit/>
+          </a:bodyPr>
+          <a:lstStyle/>
+          <a:p>
+            <a:pPr algn="l">
+              <a:lnSpc>
+                <a:spcPct val="114000"/>
+              </a:lnSpc>
+            </a:pPr>
+            <a:r>
+              <a:rPr sz="1050" b="1">
+                <a:solidFill>
+                  <a:srgbClr val="1B2B28"/>
+                </a:solidFill>
+              </a:rPr>
+              <a:t>超优</a:t>
+            </a:r>
+            <a:r>
+              <a:rPr sz="850" b="0">
+                <a:solidFill>
+                  <a:srgbClr val="5C6E6A"/>
+                </a:solidFill>
+              </a:rPr>
+              <a:t>   验收口径：</a:t>
+            </a:r>
+            <a:r>
+              <a:rPr sz="850" b="0">
+                <a:solidFill>
+                  <a:srgbClr val="5C6E6A"/>
+                </a:solidFill>
+              </a:rPr>
+              <a:t>优秀+每题附测试用例与《迁移笔记》</a:t>
+            </a:r>
+          </a:p>
+        </p:txBody>
+      </p:sp>
+      <p:sp>
+        <p:nvSpPr>
+          <p:cNvPr id="40" name="Rounded Rectangle 39"/>
+          <p:cNvSpPr/>
+          <p:nvPr/>
+        </p:nvSpPr>
+        <p:spPr>
+          <a:xfrm>
+            <a:off x="11131803" y="4588001"/>
+            <a:ext cx="453644" cy="237744"/>
+          </a:xfrm>
+          <a:prstGeom prst="roundRect">
+            <a:avLst>
+              <a:gd name="adj" fmla="val 50000"/>
+            </a:avLst>
+          </a:prstGeom>
+          <a:solidFill>
+            <a:srgbClr val="0B5E54"/>
+          </a:solidFill>
+          <a:ln>
+            <a:noFill/>
+          </a:ln>
+          <a:effectLst/>
+        </p:spPr>
+        <p:style>
+          <a:lnRef idx="1">
+            <a:schemeClr val="accent1"/>
+          </a:lnRef>
+          <a:fillRef idx="3">
+            <a:schemeClr val="accent1"/>
+          </a:fillRef>
+          <a:effectRef idx="2">
+            <a:schemeClr val="accent1"/>
+          </a:effectRef>
+          <a:fontRef idx="minor">
+            <a:schemeClr val="lt1"/>
+          </a:fontRef>
+        </p:style>
+        <p:txBody>
+          <a:bodyPr rtlCol="0" anchor="ctr"/>
+          <a:lstStyle/>
+          <a:p>
+            <a:pPr algn="ctr"/>
+          </a:p>
+        </p:txBody>
+      </p:sp>
+      <p:sp>
+        <p:nvSpPr>
+          <p:cNvPr id="41" name="TextBox 40"/>
+          <p:cNvSpPr txBox="1"/>
+          <p:nvPr/>
+        </p:nvSpPr>
+        <p:spPr>
+          <a:xfrm>
+            <a:off x="11131803" y="4588001"/>
+            <a:ext cx="453644" cy="237744"/>
+          </a:xfrm>
+          <a:prstGeom prst="rect">
+            <a:avLst/>
+          </a:prstGeom>
+          <a:noFill/>
+        </p:spPr>
+        <p:txBody>
+          <a:bodyPr wrap="square" anchor="ctr" lIns="0" rIns="0" tIns="0" bIns="0">
+            <a:spAutoFit/>
+          </a:bodyPr>
+          <a:lstStyle/>
+          <a:p>
+            <a:pPr algn="ctr">
+              <a:lnSpc>
+                <a:spcPct val="114000"/>
+              </a:lnSpc>
+            </a:pPr>
+            <a:r>
+              <a:rPr sz="850" b="1">
+                <a:solidFill>
+                  <a:srgbClr val="FFFFFF"/>
+                </a:solidFill>
+              </a:rPr>
+              <a:t>达标</a:t>
+            </a:r>
+          </a:p>
+        </p:txBody>
+      </p:sp>
+      <p:sp>
+        <p:nvSpPr>
+          <p:cNvPr id="42" name="TextBox 41"/>
+          <p:cNvSpPr txBox="1"/>
+          <p:nvPr/>
+        </p:nvSpPr>
+        <p:spPr>
+          <a:xfrm>
+            <a:off x="932688" y="4844033"/>
+            <a:ext cx="10671047" cy="514350"/>
+          </a:xfrm>
+          <a:prstGeom prst="rect">
+            <a:avLst/>
+          </a:prstGeom>
+          <a:noFill/>
+        </p:spPr>
+        <p:txBody>
+          <a:bodyPr wrap="square" anchor="t" lIns="0" rIns="0" tIns="0" bIns="0">
+            <a:spAutoFit/>
+          </a:bodyPr>
+          <a:lstStyle/>
+          <a:p>
+            <a:pPr algn="l">
+              <a:lnSpc>
+                <a:spcPct val="114000"/>
+              </a:lnSpc>
+            </a:pPr>
+            <a:r>
+              <a:rPr sz="950" b="0">
+                <a:solidFill>
+                  <a:srgbClr val="1B2B28"/>
+                </a:solidFill>
+              </a:rPr>
+              <a:t>每题 pytest 用例 题1 24｜题2 17｜题3 26｜题4 19｜题5 18（线 ≥1）｜迁移笔记 存在=是 正文 15 条（≥10）逐题易错点 5/5 必备章节=是</a:t>
+            </a:r>
+          </a:p>
+        </p:txBody>
+      </p:sp>
+      <p:sp>
+        <p:nvSpPr>
+          <p:cNvPr id="43" name="Rounded Rectangle 42"/>
+          <p:cNvSpPr/>
+          <p:nvPr/>
+        </p:nvSpPr>
+        <p:spPr>
+          <a:xfrm>
+            <a:off x="475488" y="5477255"/>
+            <a:ext cx="11237976" cy="941832"/>
+          </a:xfrm>
+          <a:prstGeom prst="roundRect">
+            <a:avLst>
+              <a:gd name="adj" fmla="val 5000"/>
+            </a:avLst>
+          </a:prstGeom>
+          <a:solidFill>
+            <a:srgbClr val="E4F1EE"/>
+          </a:solidFill>
+          <a:ln>
+            <a:noFill/>
+          </a:ln>
+          <a:effectLst/>
+        </p:spPr>
+        <p:style>
+          <a:lnRef idx="1">
+            <a:schemeClr val="accent1"/>
+          </a:lnRef>
+          <a:fillRef idx="3">
+            <a:schemeClr val="accent1"/>
+          </a:fillRef>
+          <a:effectRef idx="2">
+            <a:schemeClr val="accent1"/>
+          </a:effectRef>
+          <a:fontRef idx="minor">
+            <a:schemeClr val="lt1"/>
+          </a:fontRef>
+        </p:style>
+        <p:txBody>
+          <a:bodyPr rtlCol="0" anchor="ctr"/>
+          <a:lstStyle/>
+          <a:p>
+            <a:pPr algn="ctr"/>
+          </a:p>
+        </p:txBody>
+      </p:sp>
+      <p:sp>
+        <p:nvSpPr>
+          <p:cNvPr id="44" name="Rounded Rectangle 43"/>
+          <p:cNvSpPr/>
+          <p:nvPr/>
+        </p:nvSpPr>
+        <p:spPr>
+          <a:xfrm>
+            <a:off x="475488" y="5477255"/>
+            <a:ext cx="54864" cy="941832"/>
+          </a:xfrm>
+          <a:prstGeom prst="roundRect">
+            <a:avLst>
+              <a:gd name="adj" fmla="val 50000"/>
+            </a:avLst>
+          </a:prstGeom>
+          <a:solidFill>
+            <a:srgbClr val="C9A227"/>
+          </a:solidFill>
+          <a:ln>
+            <a:noFill/>
+          </a:ln>
+          <a:effectLst/>
+        </p:spPr>
+        <p:style>
+          <a:lnRef idx="1">
+            <a:schemeClr val="accent1"/>
+          </a:lnRef>
+          <a:fillRef idx="3">
+            <a:schemeClr val="accent1"/>
+          </a:fillRef>
+          <a:effectRef idx="2">
+            <a:schemeClr val="accent1"/>
+          </a:effectRef>
+          <a:fontRef idx="minor">
+            <a:schemeClr val="lt1"/>
+          </a:fontRef>
+        </p:style>
+        <p:txBody>
+          <a:bodyPr rtlCol="0" anchor="ctr"/>
+          <a:lstStyle/>
+          <a:p>
+            <a:pPr algn="ctr"/>
+          </a:p>
+        </p:txBody>
+      </p:sp>
+      <p:sp>
+        <p:nvSpPr>
+          <p:cNvPr id="45" name="TextBox 44"/>
+          <p:cNvSpPr txBox="1"/>
+          <p:nvPr/>
+        </p:nvSpPr>
+        <p:spPr>
+          <a:xfrm>
+            <a:off x="676656" y="5550407"/>
+            <a:ext cx="10908792" cy="795528"/>
+          </a:xfrm>
+          <a:prstGeom prst="rect">
+            <a:avLst/>
+          </a:prstGeom>
+          <a:noFill/>
+        </p:spPr>
+        <p:txBody>
+          <a:bodyPr wrap="square" anchor="t" lIns="0" rIns="0" tIns="0" bIns="0">
+            <a:spAutoFit/>
+          </a:bodyPr>
+          <a:lstStyle/>
+          <a:p>
+            <a:pPr algn="l">
+              <a:lnSpc>
+                <a:spcPct val="124000"/>
+              </a:lnSpc>
+            </a:pPr>
+            <a:r>
+              <a:rPr sz="850" b="0">
+                <a:solidFill>
+                  <a:srgbClr val="1B2B28"/>
+                </a:solidFill>
+              </a:rPr>
+              <a:t>出处：工程化项目/p11_exercises/output/report.txt 第 54 节「分层达标」——本机 2026-10-28 05:06 实跑落盘，上表数字逐字摘录、未改写。</a:t>
+            </a:r>
+          </a:p>
+          <a:p>
+            <a:pPr algn="l">
+              <a:lnSpc>
+                <a:spcPct val="124000"/>
+              </a:lnSpc>
+            </a:pPr>
+            <a:r>
+              <a:rPr sz="850" b="0">
+                <a:solidFill>
+                  <a:srgbClr val="1B2B28"/>
+                </a:solidFill>
+              </a:rPr>
+              <a:t>复现：cd 工程化项目/p11_exercises &amp;&amp; python run.py &amp;&amp; python -m pytest -q -o addopts=''</a:t>
+            </a:r>
+          </a:p>
+          <a:p>
+            <a:pPr algn="l">
+              <a:lnSpc>
+                <a:spcPct val="124000"/>
+              </a:lnSpc>
+            </a:pPr>
+            <a:r>
+              <a:rPr sz="850" b="0">
+                <a:solidFill>
+                  <a:srgbClr val="1B2B28"/>
+                </a:solidFill>
+              </a:rPr>
+              <a:t>口径：表中「判定」沿用报告原词——绿=达标/通过，黄=仅本节取证项通过（未取证子项在报告里逐条点名），红=未达标。</a:t>
+            </a:r>
+          </a:p>
+        </p:txBody>
+      </p:sp>
+    </p:spTree>
+  </p:cSld>
+  <p:clrMapOvr>
+    <a:masterClrMapping/>
+  </p:clrMapOvr>
+</p:sld>
+</file>
+
+<file path=ppt/slides/slide68.xml><?xml version="1.0" encoding="utf-8"?>
+<p:sld xmlns:a="http://schemas.openxmlformats.org/drawingml/2006/main" xmlns:p="http://schemas.openxmlformats.org/presentationml/2006/main" xmlns:r="http://schemas.openxmlformats.org/officeDocument/2006/relationships">
+  <p:cSld>
+    <p:spTree>
+      <p:nvGrpSpPr>
+        <p:cNvPr id="1" name=""/>
+        <p:cNvGrpSpPr/>
+        <p:nvPr/>
+      </p:nvGrpSpPr>
+      <p:grpSpPr/>
+      <p:sp>
+        <p:nvSpPr>
+          <p:cNvPr id="2" name="Rounded Rectangle 1"/>
+          <p:cNvSpPr/>
+          <p:nvPr/>
+        </p:nvSpPr>
+        <p:spPr>
+          <a:xfrm>
+            <a:off x="0" y="0"/>
+            <a:ext cx="12191695" cy="64008"/>
+          </a:xfrm>
+          <a:prstGeom prst="roundRect">
+            <a:avLst>
+              <a:gd name="adj" fmla="val 50000"/>
+            </a:avLst>
+          </a:prstGeom>
+          <a:solidFill>
+            <a:srgbClr val="0B5E54"/>
+          </a:solidFill>
+          <a:ln>
+            <a:noFill/>
+          </a:ln>
+          <a:effectLst/>
+        </p:spPr>
+        <p:style>
+          <a:lnRef idx="1">
+            <a:schemeClr val="accent1"/>
+          </a:lnRef>
+          <a:fillRef idx="3">
+            <a:schemeClr val="accent1"/>
+          </a:fillRef>
+          <a:effectRef idx="2">
+            <a:schemeClr val="accent1"/>
+          </a:effectRef>
+          <a:fontRef idx="minor">
+            <a:schemeClr val="lt1"/>
+          </a:fontRef>
+        </p:style>
+        <p:txBody>
+          <a:bodyPr rtlCol="0" anchor="ctr"/>
+          <a:lstStyle/>
+          <a:p>
+            <a:pPr algn="ctr"/>
+          </a:p>
+        </p:txBody>
+      </p:sp>
+      <p:sp>
+        <p:nvSpPr>
+          <p:cNvPr id="3" name="TextBox 2"/>
+          <p:cNvSpPr txBox="1"/>
+          <p:nvPr/>
+        </p:nvSpPr>
+        <p:spPr>
+          <a:xfrm>
+            <a:off x="475488" y="146304"/>
+            <a:ext cx="8229600" cy="292608"/>
+          </a:xfrm>
+          <a:prstGeom prst="rect">
+            <a:avLst/>
+          </a:prstGeom>
+          <a:noFill/>
+        </p:spPr>
+        <p:txBody>
+          <a:bodyPr wrap="square" anchor="t" lIns="0" rIns="0" tIns="0" bIns="0">
+            <a:spAutoFit/>
+          </a:bodyPr>
+          <a:lstStyle/>
+          <a:p>
+            <a:pPr algn="l">
+              <a:lnSpc>
+                <a:spcPct val="114000"/>
+              </a:lnSpc>
+            </a:pPr>
+            <a:r>
+              <a:rPr sz="1100" b="1">
+                <a:solidFill>
+                  <a:srgbClr val="0B5E54"/>
+                </a:solidFill>
+              </a:rPr>
+              <a:t>工单实战 · 运行留证</a:t>
+            </a:r>
+          </a:p>
+        </p:txBody>
+      </p:sp>
+      <p:sp>
+        <p:nvSpPr>
+          <p:cNvPr id="4" name="Rounded Rectangle 3"/>
+          <p:cNvSpPr/>
+          <p:nvPr/>
+        </p:nvSpPr>
+        <p:spPr>
+          <a:xfrm>
+            <a:off x="475488" y="475488"/>
+            <a:ext cx="2027872" cy="310896"/>
+          </a:xfrm>
+          <a:prstGeom prst="roundRect">
+            <a:avLst>
+              <a:gd name="adj" fmla="val 50000"/>
+            </a:avLst>
+          </a:prstGeom>
+          <a:solidFill>
+            <a:srgbClr val="C9A227"/>
+          </a:solidFill>
+          <a:ln>
+            <a:noFill/>
+          </a:ln>
+          <a:effectLst/>
+        </p:spPr>
+        <p:style>
+          <a:lnRef idx="1">
+            <a:schemeClr val="accent1"/>
+          </a:lnRef>
+          <a:fillRef idx="3">
+            <a:schemeClr val="accent1"/>
+          </a:fillRef>
+          <a:effectRef idx="2">
+            <a:schemeClr val="accent1"/>
+          </a:effectRef>
+          <a:fontRef idx="minor">
+            <a:schemeClr val="lt1"/>
+          </a:fontRef>
+        </p:style>
+        <p:txBody>
+          <a:bodyPr rtlCol="0" anchor="ctr"/>
+          <a:lstStyle/>
+          <a:p>
+            <a:pPr algn="ctr"/>
+          </a:p>
+        </p:txBody>
+      </p:sp>
+      <p:sp>
+        <p:nvSpPr>
+          <p:cNvPr id="5" name="TextBox 4"/>
+          <p:cNvSpPr txBox="1"/>
+          <p:nvPr/>
+        </p:nvSpPr>
+        <p:spPr>
+          <a:xfrm>
+            <a:off x="475488" y="475488"/>
+            <a:ext cx="2027872" cy="310896"/>
+          </a:xfrm>
+          <a:prstGeom prst="rect">
+            <a:avLst/>
+          </a:prstGeom>
+          <a:noFill/>
+        </p:spPr>
+        <p:txBody>
+          <a:bodyPr wrap="square" anchor="ctr" lIns="0" rIns="0" tIns="0" bIns="0">
+            <a:spAutoFit/>
+          </a:bodyPr>
+          <a:lstStyle/>
+          <a:p>
+            <a:pPr algn="ctr">
+              <a:lnSpc>
+                <a:spcPct val="114000"/>
+              </a:lnSpc>
+            </a:pPr>
+            <a:r>
+              <a:rPr sz="1050" b="1">
+                <a:solidFill>
+                  <a:srgbClr val="FFFFFF"/>
+                </a:solidFill>
+              </a:rPr>
+              <a:t>SCREENSHOT · 终端逐字截图</a:t>
+            </a:r>
+          </a:p>
+        </p:txBody>
+      </p:sp>
+      <p:sp>
+        <p:nvSpPr>
+          <p:cNvPr id="6" name="TextBox 5"/>
+          <p:cNvSpPr txBox="1"/>
+          <p:nvPr/>
+        </p:nvSpPr>
+        <p:spPr>
+          <a:xfrm>
+            <a:off x="475488" y="859536"/>
+            <a:ext cx="11237976" cy="502920"/>
+          </a:xfrm>
+          <a:prstGeom prst="rect">
+            <a:avLst/>
+          </a:prstGeom>
+          <a:noFill/>
+        </p:spPr>
+        <p:txBody>
+          <a:bodyPr wrap="square" anchor="t" lIns="0" rIns="0" tIns="0" bIns="0">
+            <a:spAutoFit/>
+          </a:bodyPr>
+          <a:lstStyle/>
+          <a:p>
+            <a:pPr algn="l">
+              <a:lnSpc>
+                <a:spcPct val="114000"/>
+              </a:lnSpc>
+            </a:pPr>
+            <a:r>
+              <a:rPr sz="2200" b="1">
+                <a:solidFill>
+                  <a:srgbClr val="1B2B28"/>
+                </a:solidFill>
+              </a:rPr>
+              <a:t>P1.1 分层达标 · 四档逐字输出截图</a:t>
+            </a:r>
+          </a:p>
+        </p:txBody>
+      </p:sp>
+      <p:sp>
+        <p:nvSpPr>
+          <p:cNvPr id="7" name="Rounded Rectangle 6"/>
+          <p:cNvSpPr/>
+          <p:nvPr/>
+        </p:nvSpPr>
+        <p:spPr>
+          <a:xfrm>
+            <a:off x="475488" y="1389888"/>
+            <a:ext cx="1234440" cy="27432"/>
+          </a:xfrm>
+          <a:prstGeom prst="roundRect">
+            <a:avLst>
+              <a:gd name="adj" fmla="val 50000"/>
+            </a:avLst>
+          </a:prstGeom>
+          <a:solidFill>
+            <a:srgbClr val="C9A227"/>
+          </a:solidFill>
+          <a:ln>
+            <a:noFill/>
+          </a:ln>
+          <a:effectLst/>
+        </p:spPr>
+        <p:style>
+          <a:lnRef idx="1">
+            <a:schemeClr val="accent1"/>
+          </a:lnRef>
+          <a:fillRef idx="3">
+            <a:schemeClr val="accent1"/>
+          </a:fillRef>
+          <a:effectRef idx="2">
+            <a:schemeClr val="accent1"/>
+          </a:effectRef>
+          <a:fontRef idx="minor">
+            <a:schemeClr val="lt1"/>
+          </a:fontRef>
+        </p:style>
+        <p:txBody>
+          <a:bodyPr rtlCol="0" anchor="ctr"/>
+          <a:lstStyle/>
+          <a:p>
+            <a:pPr algn="ctr"/>
+          </a:p>
+        </p:txBody>
+      </p:sp>
+      <p:sp>
+        <p:nvSpPr>
+          <p:cNvPr id="8" name="Rounded Rectangle 7"/>
+          <p:cNvSpPr/>
+          <p:nvPr/>
+        </p:nvSpPr>
+        <p:spPr>
+          <a:xfrm>
+            <a:off x="475488" y="6419088"/>
+            <a:ext cx="11237976" cy="10972"/>
+          </a:xfrm>
+          <a:prstGeom prst="roundRect">
+            <a:avLst>
+              <a:gd name="adj" fmla="val 50000"/>
+            </a:avLst>
+          </a:prstGeom>
+          <a:solidFill>
+            <a:srgbClr val="E4F1EE"/>
+          </a:solidFill>
+          <a:ln>
+            <a:noFill/>
+          </a:ln>
+          <a:effectLst/>
+        </p:spPr>
+        <p:style>
+          <a:lnRef idx="1">
+            <a:schemeClr val="accent1"/>
+          </a:lnRef>
+          <a:fillRef idx="3">
+            <a:schemeClr val="accent1"/>
+          </a:fillRef>
+          <a:effectRef idx="2">
+            <a:schemeClr val="accent1"/>
+          </a:effectRef>
+          <a:fontRef idx="minor">
+            <a:schemeClr val="lt1"/>
+          </a:fontRef>
+        </p:style>
+        <p:txBody>
+          <a:bodyPr rtlCol="0" anchor="ctr"/>
+          <a:lstStyle/>
+          <a:p>
+            <a:pPr algn="ctr"/>
+          </a:p>
+        </p:txBody>
+      </p:sp>
+      <p:sp>
+        <p:nvSpPr>
+          <p:cNvPr id="9" name="TextBox 8"/>
+          <p:cNvSpPr txBox="1"/>
+          <p:nvPr/>
+        </p:nvSpPr>
+        <p:spPr>
+          <a:xfrm>
+            <a:off x="475488" y="6455664"/>
+            <a:ext cx="7315200" cy="292608"/>
+          </a:xfrm>
+          <a:prstGeom prst="rect">
+            <a:avLst/>
+          </a:prstGeom>
+          <a:noFill/>
+        </p:spPr>
+        <p:txBody>
+          <a:bodyPr wrap="square" anchor="t" lIns="0" rIns="0" tIns="0" bIns="0">
+            <a:spAutoFit/>
+          </a:bodyPr>
+          <a:lstStyle/>
+          <a:p>
+            <a:pPr algn="l">
+              <a:lnSpc>
+                <a:spcPct val="114000"/>
+              </a:lnSpc>
+            </a:pPr>
+            <a:r>
+              <a:rPr sz="900" b="0">
+                <a:solidFill>
+                  <a:srgbClr val="5C6E6A"/>
+                </a:solidFill>
+              </a:rPr>
+              <a:t>两江智造集团 · Python程序设计（项目实战）</a:t>
+            </a:r>
+          </a:p>
+        </p:txBody>
+      </p:sp>
+      <p:sp>
+        <p:nvSpPr>
+          <p:cNvPr id="10" name="TextBox 9"/>
+          <p:cNvSpPr txBox="1"/>
+          <p:nvPr/>
+        </p:nvSpPr>
+        <p:spPr>
+          <a:xfrm>
+            <a:off x="10597896" y="6537960"/>
+            <a:ext cx="996696" cy="301752"/>
+          </a:xfrm>
+          <a:prstGeom prst="rect">
+            <a:avLst/>
+          </a:prstGeom>
+          <a:noFill/>
+        </p:spPr>
+        <p:txBody>
+          <a:bodyPr wrap="square" anchor="t" lIns="0" rIns="0" tIns="0" bIns="0">
+            <a:spAutoFit/>
+          </a:bodyPr>
+          <a:lstStyle/>
+          <a:p>
+            <a:pPr algn="r">
+              <a:lnSpc>
+                <a:spcPct val="114000"/>
+              </a:lnSpc>
+            </a:pPr>
+            <a:r>
+              <a:rPr sz="1000" b="0">
+                <a:solidFill>
+                  <a:srgbClr val="8A97B5"/>
+                </a:solidFill>
+              </a:rPr>
+              <a:t>52 / 69</a:t>
+            </a:r>
+          </a:p>
+        </p:txBody>
+      </p:sp>
+      <p:sp>
+        <p:nvSpPr>
+          <p:cNvPr id="11" name="TextBox 10"/>
+          <p:cNvSpPr txBox="1"/>
+          <p:nvPr/>
+        </p:nvSpPr>
+        <p:spPr>
+          <a:xfrm>
+            <a:off x="475488" y="1517904"/>
+            <a:ext cx="11237976" cy="237744"/>
+          </a:xfrm>
+          <a:prstGeom prst="rect">
+            <a:avLst/>
+          </a:prstGeom>
+          <a:noFill/>
+        </p:spPr>
+        <p:txBody>
+          <a:bodyPr wrap="square" anchor="t" lIns="0" rIns="0" tIns="0" bIns="0">
+            <a:spAutoFit/>
+          </a:bodyPr>
+          <a:lstStyle/>
+          <a:p>
+            <a:pPr algn="l">
+              <a:lnSpc>
+                <a:spcPct val="114000"/>
+              </a:lnSpc>
+            </a:pPr>
+            <a:r>
+              <a:rPr sz="1000" b="0">
+                <a:solidFill>
+                  <a:srgbClr val="5C6E6A"/>
+                </a:solidFill>
+              </a:rPr>
+              <a:t>终端窗口截图：由 report.txt 本节逐字渲染，未手工改写</a:t>
+            </a:r>
+          </a:p>
+        </p:txBody>
+      </p:sp>
+      <p:pic>
+        <p:nvPicPr>
+          <p:cNvPr id="12" name="Picture 11" descr="p11_exercises_classroom.png"/>
+          <p:cNvPicPr>
+            <a:picLocks noChangeAspect="1"/>
+          </p:cNvPicPr>
+          <p:nvPr/>
+        </p:nvPicPr>
+        <p:blipFill>
+          <a:blip r:embed="rId2"/>
+          <a:stretch>
+            <a:fillRect/>
+          </a:stretch>
+        </p:blipFill>
+        <p:spPr>
+          <a:xfrm>
+            <a:off x="702845" y="1792224"/>
+            <a:ext cx="10783260" cy="3849624"/>
+          </a:xfrm>
+          <a:prstGeom prst="rect">
+            <a:avLst/>
+          </a:prstGeom>
+        </p:spPr>
+      </p:pic>
+      <p:sp>
+        <p:nvSpPr>
+          <p:cNvPr id="13" name="TextBox 12"/>
+          <p:cNvSpPr txBox="1"/>
+          <p:nvPr/>
+        </p:nvSpPr>
+        <p:spPr>
+          <a:xfrm>
+            <a:off x="475488" y="5678424"/>
+            <a:ext cx="11237976" cy="256032"/>
+          </a:xfrm>
+          <a:prstGeom prst="rect">
+            <a:avLst/>
+          </a:prstGeom>
+          <a:noFill/>
+        </p:spPr>
+        <p:txBody>
+          <a:bodyPr wrap="square" anchor="t" lIns="0" rIns="0" tIns="0" bIns="0">
+            <a:spAutoFit/>
+          </a:bodyPr>
+          <a:lstStyle/>
+          <a:p>
+            <a:pPr algn="l">
+              <a:lnSpc>
+                <a:spcPct val="114000"/>
+              </a:lnSpc>
+            </a:pPr>
+            <a:r>
+              <a:rPr sz="850" b="0">
+                <a:solidFill>
+                  <a:srgbClr val="5C6E6A"/>
+                </a:solidFill>
+              </a:rPr>
+              <a:t>▲ p11_exercises：分层达标 第 54 行起的四档逐字原文（绿=达标/通过，黄=仅本节取证项，橙=未实测项）</a:t>
+            </a:r>
+          </a:p>
+        </p:txBody>
+      </p:sp>
+    </p:spTree>
+  </p:cSld>
+  <p:clrMapOvr>
+    <a:masterClrMapping/>
+  </p:clrMapOvr>
+</p:sld>
+</file>
+
+<file path=ppt/slides/slide69.xml><?xml version="1.0" encoding="utf-8"?>
+<p:sld xmlns:a="http://schemas.openxmlformats.org/drawingml/2006/main" xmlns:p="http://schemas.openxmlformats.org/presentationml/2006/main" xmlns:r="http://schemas.openxmlformats.org/officeDocument/2006/relationships">
+  <p:cSld>
+    <p:spTree>
+      <p:nvGrpSpPr>
+        <p:cNvPr id="1" name=""/>
+        <p:cNvGrpSpPr/>
+        <p:nvPr/>
+      </p:nvGrpSpPr>
+      <p:grpSpPr/>
+      <p:sp>
+        <p:nvSpPr>
+          <p:cNvPr id="2" name="Rounded Rectangle 1"/>
+          <p:cNvSpPr/>
+          <p:nvPr/>
+        </p:nvSpPr>
+        <p:spPr>
+          <a:xfrm>
+            <a:off x="0" y="0"/>
+            <a:ext cx="12191695" cy="64008"/>
+          </a:xfrm>
+          <a:prstGeom prst="roundRect">
+            <a:avLst>
+              <a:gd name="adj" fmla="val 50000"/>
+            </a:avLst>
+          </a:prstGeom>
+          <a:solidFill>
+            <a:srgbClr val="0B5E54"/>
+          </a:solidFill>
+          <a:ln>
+            <a:noFill/>
+          </a:ln>
+          <a:effectLst/>
+        </p:spPr>
+        <p:style>
+          <a:lnRef idx="1">
+            <a:schemeClr val="accent1"/>
+          </a:lnRef>
+          <a:fillRef idx="3">
+            <a:schemeClr val="accent1"/>
+          </a:fillRef>
+          <a:effectRef idx="2">
+            <a:schemeClr val="accent1"/>
+          </a:effectRef>
+          <a:fontRef idx="minor">
+            <a:schemeClr val="lt1"/>
+          </a:fontRef>
+        </p:style>
+        <p:txBody>
+          <a:bodyPr rtlCol="0" anchor="ctr"/>
+          <a:lstStyle/>
+          <a:p>
+            <a:pPr algn="ctr"/>
+          </a:p>
+        </p:txBody>
+      </p:sp>
+      <p:sp>
+        <p:nvSpPr>
+          <p:cNvPr id="3" name="TextBox 2"/>
+          <p:cNvSpPr txBox="1"/>
+          <p:nvPr/>
+        </p:nvSpPr>
+        <p:spPr>
+          <a:xfrm>
+            <a:off x="475488" y="146304"/>
+            <a:ext cx="8229600" cy="292608"/>
+          </a:xfrm>
+          <a:prstGeom prst="rect">
+            <a:avLst/>
+          </a:prstGeom>
+          <a:noFill/>
+        </p:spPr>
+        <p:txBody>
+          <a:bodyPr wrap="square" anchor="t" lIns="0" rIns="0" tIns="0" bIns="0">
+            <a:spAutoFit/>
+          </a:bodyPr>
+          <a:lstStyle/>
+          <a:p>
+            <a:pPr algn="l">
+              <a:lnSpc>
+                <a:spcPct val="114000"/>
+              </a:lnSpc>
+            </a:pPr>
+            <a:r>
+              <a:rPr sz="1100" b="1">
+                <a:solidFill>
+                  <a:srgbClr val="0B5E54"/>
+                </a:solidFill>
+              </a:rPr>
+              <a:t>工单实战 · 运行留证</a:t>
+            </a:r>
+          </a:p>
+        </p:txBody>
+      </p:sp>
+      <p:sp>
+        <p:nvSpPr>
+          <p:cNvPr id="4" name="Rounded Rectangle 3"/>
+          <p:cNvSpPr/>
+          <p:nvPr/>
+        </p:nvSpPr>
+        <p:spPr>
+          <a:xfrm>
+            <a:off x="475488" y="475488"/>
+            <a:ext cx="2027872" cy="310896"/>
+          </a:xfrm>
+          <a:prstGeom prst="roundRect">
+            <a:avLst>
+              <a:gd name="adj" fmla="val 50000"/>
+            </a:avLst>
+          </a:prstGeom>
+          <a:solidFill>
+            <a:srgbClr val="C9A227"/>
+          </a:solidFill>
+          <a:ln>
+            <a:noFill/>
+          </a:ln>
+          <a:effectLst/>
+        </p:spPr>
+        <p:style>
+          <a:lnRef idx="1">
+            <a:schemeClr val="accent1"/>
+          </a:lnRef>
+          <a:fillRef idx="3">
+            <a:schemeClr val="accent1"/>
+          </a:fillRef>
+          <a:effectRef idx="2">
+            <a:schemeClr val="accent1"/>
+          </a:effectRef>
+          <a:fontRef idx="minor">
+            <a:schemeClr val="lt1"/>
+          </a:fontRef>
+        </p:style>
+        <p:txBody>
+          <a:bodyPr rtlCol="0" anchor="ctr"/>
+          <a:lstStyle/>
+          <a:p>
+            <a:pPr algn="ctr"/>
+          </a:p>
+        </p:txBody>
+      </p:sp>
+      <p:sp>
+        <p:nvSpPr>
+          <p:cNvPr id="5" name="TextBox 4"/>
+          <p:cNvSpPr txBox="1"/>
+          <p:nvPr/>
+        </p:nvSpPr>
+        <p:spPr>
+          <a:xfrm>
+            <a:off x="475488" y="475488"/>
+            <a:ext cx="2027872" cy="310896"/>
+          </a:xfrm>
+          <a:prstGeom prst="rect">
+            <a:avLst/>
+          </a:prstGeom>
+          <a:noFill/>
+        </p:spPr>
+        <p:txBody>
+          <a:bodyPr wrap="square" anchor="ctr" lIns="0" rIns="0" tIns="0" bIns="0">
+            <a:spAutoFit/>
+          </a:bodyPr>
+          <a:lstStyle/>
+          <a:p>
+            <a:pPr algn="ctr">
+              <a:lnSpc>
+                <a:spcPct val="114000"/>
+              </a:lnSpc>
+            </a:pPr>
+            <a:r>
+              <a:rPr sz="1050" b="1">
+                <a:solidFill>
+                  <a:srgbClr val="FFFFFF"/>
+                </a:solidFill>
+              </a:rPr>
+              <a:t>SCREENSHOT · 终端逐字截图</a:t>
+            </a:r>
+          </a:p>
+        </p:txBody>
+      </p:sp>
+      <p:sp>
+        <p:nvSpPr>
+          <p:cNvPr id="6" name="TextBox 5"/>
+          <p:cNvSpPr txBox="1"/>
+          <p:nvPr/>
+        </p:nvSpPr>
+        <p:spPr>
+          <a:xfrm>
+            <a:off x="475488" y="859536"/>
+            <a:ext cx="11237976" cy="502920"/>
+          </a:xfrm>
+          <a:prstGeom prst="rect">
+            <a:avLst/>
+          </a:prstGeom>
+          <a:noFill/>
+        </p:spPr>
+        <p:txBody>
+          <a:bodyPr wrap="square" anchor="t" lIns="0" rIns="0" tIns="0" bIns="0">
+            <a:spAutoFit/>
+          </a:bodyPr>
+          <a:lstStyle/>
+          <a:p>
+            <a:pPr algn="l">
+              <a:lnSpc>
+                <a:spcPct val="114000"/>
+              </a:lnSpc>
+            </a:pPr>
+            <a:r>
+              <a:rPr sz="2200" b="1">
+                <a:solidFill>
+                  <a:srgbClr val="1B2B28"/>
+                </a:solidFill>
+              </a:rPr>
+              <a:t>P1.1 · 测试全绿证据＋pytest 全量实跑</a:t>
+            </a:r>
+          </a:p>
+        </p:txBody>
+      </p:sp>
+      <p:sp>
+        <p:nvSpPr>
+          <p:cNvPr id="7" name="Rounded Rectangle 6"/>
+          <p:cNvSpPr/>
+          <p:nvPr/>
+        </p:nvSpPr>
+        <p:spPr>
+          <a:xfrm>
+            <a:off x="475488" y="1389888"/>
+            <a:ext cx="1234440" cy="27432"/>
+          </a:xfrm>
+          <a:prstGeom prst="roundRect">
+            <a:avLst>
+              <a:gd name="adj" fmla="val 50000"/>
+            </a:avLst>
+          </a:prstGeom>
+          <a:solidFill>
+            <a:srgbClr val="C9A227"/>
+          </a:solidFill>
+          <a:ln>
+            <a:noFill/>
+          </a:ln>
+          <a:effectLst/>
+        </p:spPr>
+        <p:style>
+          <a:lnRef idx="1">
+            <a:schemeClr val="accent1"/>
+          </a:lnRef>
+          <a:fillRef idx="3">
+            <a:schemeClr val="accent1"/>
+          </a:fillRef>
+          <a:effectRef idx="2">
+            <a:schemeClr val="accent1"/>
+          </a:effectRef>
+          <a:fontRef idx="minor">
+            <a:schemeClr val="lt1"/>
+          </a:fontRef>
+        </p:style>
+        <p:txBody>
+          <a:bodyPr rtlCol="0" anchor="ctr"/>
+          <a:lstStyle/>
+          <a:p>
+            <a:pPr algn="ctr"/>
+          </a:p>
+        </p:txBody>
+      </p:sp>
+      <p:sp>
+        <p:nvSpPr>
+          <p:cNvPr id="8" name="Rounded Rectangle 7"/>
+          <p:cNvSpPr/>
+          <p:nvPr/>
+        </p:nvSpPr>
+        <p:spPr>
+          <a:xfrm>
+            <a:off x="475488" y="6419088"/>
+            <a:ext cx="11237976" cy="10972"/>
+          </a:xfrm>
+          <a:prstGeom prst="roundRect">
+            <a:avLst>
+              <a:gd name="adj" fmla="val 50000"/>
+            </a:avLst>
+          </a:prstGeom>
+          <a:solidFill>
+            <a:srgbClr val="E4F1EE"/>
+          </a:solidFill>
+          <a:ln>
+            <a:noFill/>
+          </a:ln>
+          <a:effectLst/>
+        </p:spPr>
+        <p:style>
+          <a:lnRef idx="1">
+            <a:schemeClr val="accent1"/>
+          </a:lnRef>
+          <a:fillRef idx="3">
+            <a:schemeClr val="accent1"/>
+          </a:fillRef>
+          <a:effectRef idx="2">
+            <a:schemeClr val="accent1"/>
+          </a:effectRef>
+          <a:fontRef idx="minor">
+            <a:schemeClr val="lt1"/>
+          </a:fontRef>
+        </p:style>
+        <p:txBody>
+          <a:bodyPr rtlCol="0" anchor="ctr"/>
+          <a:lstStyle/>
+          <a:p>
+            <a:pPr algn="ctr"/>
+          </a:p>
+        </p:txBody>
+      </p:sp>
+      <p:sp>
+        <p:nvSpPr>
+          <p:cNvPr id="9" name="TextBox 8"/>
+          <p:cNvSpPr txBox="1"/>
+          <p:nvPr/>
+        </p:nvSpPr>
+        <p:spPr>
+          <a:xfrm>
+            <a:off x="475488" y="6455664"/>
+            <a:ext cx="7315200" cy="292608"/>
+          </a:xfrm>
+          <a:prstGeom prst="rect">
+            <a:avLst/>
+          </a:prstGeom>
+          <a:noFill/>
+        </p:spPr>
+        <p:txBody>
+          <a:bodyPr wrap="square" anchor="t" lIns="0" rIns="0" tIns="0" bIns="0">
+            <a:spAutoFit/>
+          </a:bodyPr>
+          <a:lstStyle/>
+          <a:p>
+            <a:pPr algn="l">
+              <a:lnSpc>
+                <a:spcPct val="114000"/>
+              </a:lnSpc>
+            </a:pPr>
+            <a:r>
+              <a:rPr sz="900" b="0">
+                <a:solidFill>
+                  <a:srgbClr val="5C6E6A"/>
+                </a:solidFill>
+              </a:rPr>
+              <a:t>两江智造集团 · Python程序设计（项目实战）</a:t>
+            </a:r>
+          </a:p>
+        </p:txBody>
+      </p:sp>
+      <p:sp>
+        <p:nvSpPr>
+          <p:cNvPr id="10" name="TextBox 9"/>
+          <p:cNvSpPr txBox="1"/>
+          <p:nvPr/>
+        </p:nvSpPr>
+        <p:spPr>
+          <a:xfrm>
+            <a:off x="10597896" y="6537960"/>
+            <a:ext cx="996696" cy="301752"/>
+          </a:xfrm>
+          <a:prstGeom prst="rect">
+            <a:avLst/>
+          </a:prstGeom>
+          <a:noFill/>
+        </p:spPr>
+        <p:txBody>
+          <a:bodyPr wrap="square" anchor="t" lIns="0" rIns="0" tIns="0" bIns="0">
+            <a:spAutoFit/>
+          </a:bodyPr>
+          <a:lstStyle/>
+          <a:p>
+            <a:pPr algn="r">
+              <a:lnSpc>
+                <a:spcPct val="114000"/>
+              </a:lnSpc>
+            </a:pPr>
+            <a:r>
+              <a:rPr sz="1000" b="0">
+                <a:solidFill>
+                  <a:srgbClr val="8A97B5"/>
+                </a:solidFill>
+              </a:rPr>
+              <a:t>53 / 69</a:t>
+            </a:r>
+          </a:p>
+        </p:txBody>
+      </p:sp>
+      <p:sp>
+        <p:nvSpPr>
+          <p:cNvPr id="11" name="TextBox 10"/>
+          <p:cNvSpPr txBox="1"/>
+          <p:nvPr/>
+        </p:nvSpPr>
+        <p:spPr>
+          <a:xfrm>
+            <a:off x="475488" y="1517904"/>
+            <a:ext cx="11237976" cy="237744"/>
+          </a:xfrm>
+          <a:prstGeom prst="rect">
+            <a:avLst/>
+          </a:prstGeom>
+          <a:noFill/>
+        </p:spPr>
+        <p:txBody>
+          <a:bodyPr wrap="square" anchor="t" lIns="0" rIns="0" tIns="0" bIns="0">
+            <a:spAutoFit/>
+          </a:bodyPr>
+          <a:lstStyle/>
+          <a:p>
+            <a:pPr algn="l">
+              <a:lnSpc>
+                <a:spcPct val="114000"/>
+              </a:lnSpc>
+            </a:pPr>
+            <a:r>
+              <a:rPr sz="1000" b="0">
+                <a:solidFill>
+                  <a:srgbClr val="5C6E6A"/>
+                </a:solidFill>
+              </a:rPr>
+              <a:t>pytest 全量实跑：本机真实运行输出，非示例、非节选</a:t>
+            </a:r>
+          </a:p>
+        </p:txBody>
+      </p:sp>
+      <p:pic>
+        <p:nvPicPr>
+          <p:cNvPr id="12" name="Picture 11" descr="p11_exercises_pytest.png"/>
+          <p:cNvPicPr>
+            <a:picLocks noChangeAspect="1"/>
+          </p:cNvPicPr>
+          <p:nvPr/>
+        </p:nvPicPr>
+        <p:blipFill>
+          <a:blip r:embed="rId2"/>
+          <a:stretch>
+            <a:fillRect/>
+          </a:stretch>
+        </p:blipFill>
+        <p:spPr>
+          <a:xfrm>
+            <a:off x="475488" y="2265275"/>
+            <a:ext cx="11237976" cy="1989122"/>
+          </a:xfrm>
+          <a:prstGeom prst="rect">
+            <a:avLst/>
+          </a:prstGeom>
+        </p:spPr>
+      </p:pic>
+      <p:sp>
+        <p:nvSpPr>
+          <p:cNvPr id="13" name="TextBox 12"/>
+          <p:cNvSpPr txBox="1"/>
+          <p:nvPr/>
+        </p:nvSpPr>
+        <p:spPr>
+          <a:xfrm>
+            <a:off x="475488" y="4290972"/>
+            <a:ext cx="11237976" cy="256032"/>
+          </a:xfrm>
+          <a:prstGeom prst="rect">
+            <a:avLst/>
+          </a:prstGeom>
+          <a:noFill/>
+        </p:spPr>
+        <p:txBody>
+          <a:bodyPr wrap="square" anchor="t" lIns="0" rIns="0" tIns="0" bIns="0">
+            <a:spAutoFit/>
+          </a:bodyPr>
+          <a:lstStyle/>
+          <a:p>
+            <a:pPr algn="l">
+              <a:lnSpc>
+                <a:spcPct val="114000"/>
+              </a:lnSpc>
+            </a:pPr>
+            <a:r>
+              <a:rPr sz="850" b="0">
+                <a:solidFill>
+                  <a:srgbClr val="5C6E6A"/>
+                </a:solidFill>
+              </a:rPr>
+              <a:t>▲ pytest：190 passed in 12.95s（本机实跑，非示例）</a:t>
+            </a:r>
+          </a:p>
+        </p:txBody>
+      </p:sp>
+      <p:sp>
+        <p:nvSpPr>
+          <p:cNvPr id="14" name="Rounded Rectangle 13"/>
+          <p:cNvSpPr/>
+          <p:nvPr/>
+        </p:nvSpPr>
+        <p:spPr>
+          <a:xfrm>
+            <a:off x="475488" y="4656732"/>
+            <a:ext cx="11237976" cy="822960"/>
+          </a:xfrm>
+          <a:prstGeom prst="roundRect">
+            <a:avLst>
+              <a:gd name="adj" fmla="val 5000"/>
+            </a:avLst>
+          </a:prstGeom>
+          <a:solidFill>
+            <a:srgbClr val="E4F1EE"/>
+          </a:solidFill>
+          <a:ln>
+            <a:noFill/>
+          </a:ln>
+          <a:effectLst/>
+        </p:spPr>
+        <p:style>
+          <a:lnRef idx="1">
+            <a:schemeClr val="accent1"/>
+          </a:lnRef>
+          <a:fillRef idx="3">
+            <a:schemeClr val="accent1"/>
+          </a:fillRef>
+          <a:effectRef idx="2">
+            <a:schemeClr val="accent1"/>
+          </a:effectRef>
+          <a:fontRef idx="minor">
+            <a:schemeClr val="lt1"/>
+          </a:fontRef>
+        </p:style>
+        <p:txBody>
+          <a:bodyPr rtlCol="0" anchor="ctr"/>
+          <a:lstStyle/>
+          <a:p>
+            <a:pPr algn="ctr"/>
+          </a:p>
+        </p:txBody>
+      </p:sp>
+      <p:sp>
+        <p:nvSpPr>
+          <p:cNvPr id="15" name="Rounded Rectangle 14"/>
+          <p:cNvSpPr/>
+          <p:nvPr/>
+        </p:nvSpPr>
+        <p:spPr>
+          <a:xfrm>
+            <a:off x="475488" y="4656732"/>
+            <a:ext cx="54864" cy="822960"/>
+          </a:xfrm>
+          <a:prstGeom prst="roundRect">
+            <a:avLst>
+              <a:gd name="adj" fmla="val 50000"/>
+            </a:avLst>
+          </a:prstGeom>
+          <a:solidFill>
+            <a:srgbClr val="C9A227"/>
+          </a:solidFill>
+          <a:ln>
+            <a:noFill/>
+          </a:ln>
+          <a:effectLst/>
+        </p:spPr>
+        <p:style>
+          <a:lnRef idx="1">
+            <a:schemeClr val="accent1"/>
+          </a:lnRef>
+          <a:fillRef idx="3">
+            <a:schemeClr val="accent1"/>
+          </a:fillRef>
+          <a:effectRef idx="2">
+            <a:schemeClr val="accent1"/>
+          </a:effectRef>
+          <a:fontRef idx="minor">
+            <a:schemeClr val="lt1"/>
+          </a:fontRef>
+        </p:style>
+        <p:txBody>
+          <a:bodyPr rtlCol="0" anchor="ctr"/>
+          <a:lstStyle/>
+          <a:p>
+            <a:pPr algn="ctr"/>
+          </a:p>
+        </p:txBody>
+      </p:sp>
+      <p:sp>
+        <p:nvSpPr>
+          <p:cNvPr id="16" name="TextBox 15"/>
+          <p:cNvSpPr txBox="1"/>
+          <p:nvPr/>
+        </p:nvSpPr>
+        <p:spPr>
+          <a:xfrm>
+            <a:off x="676656" y="4739028"/>
+            <a:ext cx="10908792" cy="658368"/>
+          </a:xfrm>
+          <a:prstGeom prst="rect">
+            <a:avLst/>
+          </a:prstGeom>
+          <a:noFill/>
+        </p:spPr>
+        <p:txBody>
+          <a:bodyPr wrap="square" anchor="t" lIns="0" rIns="0" tIns="0" bIns="0">
+            <a:spAutoFit/>
+          </a:bodyPr>
+          <a:lstStyle/>
+          <a:p>
+            <a:pPr algn="l">
+              <a:lnSpc>
+                <a:spcPct val="126000"/>
+              </a:lnSpc>
+            </a:pPr>
+            <a:r>
+              <a:rPr sz="850" b="0">
+                <a:solidFill>
+                  <a:srgbClr val="1B2B28"/>
+                </a:solidFill>
+              </a:rPr>
+              <a:t>本项目四档只有一套阶梯口径（课堂 D/C/B/A 即工单及格/良好/优秀/超优），逐字实测见上一页截图；本页补的是测试全绿证据。</a:t>
+            </a:r>
+          </a:p>
+          <a:p>
+            <a:pPr algn="l">
+              <a:lnSpc>
+                <a:spcPct val="126000"/>
+              </a:lnSpc>
+            </a:pPr>
+            <a:r>
+              <a:rPr sz="850" b="0">
+                <a:solidFill>
+                  <a:srgbClr val="1B2B28"/>
+                </a:solidFill>
+              </a:rPr>
+              <a:t>复现：cd 工程化项目/p11_exercises &amp;&amp; python -m pytest -q -o addopts=''</a:t>
+            </a:r>
+          </a:p>
+          <a:p>
+            <a:pPr algn="l">
+              <a:lnSpc>
+                <a:spcPct val="126000"/>
+              </a:lnSpc>
+            </a:pPr>
+            <a:r>
+              <a:rPr sz="850" b="0">
+                <a:solidFill>
+                  <a:srgbClr val="1B2B28"/>
+                </a:solidFill>
+              </a:rPr>
+              <a:t>工单提交：截图需含终端标题栏的文件名与完整输出，退出码 0 才算全绿。</a:t>
+            </a:r>
+          </a:p>
+        </p:txBody>
+      </p:sp>
+    </p:spTree>
+  </p:cSld>
+  <p:clrMapOvr>
+    <a:masterClrMapping/>
+  </p:clrMapOvr>
+</p:sld>
+</file>
+
 <file path=ppt/slides/slide7.xml><?xml version="1.0" encoding="utf-8"?>
 <p:sld xmlns:a="http://schemas.openxmlformats.org/drawingml/2006/main" xmlns:p="http://schemas.openxmlformats.org/presentationml/2006/main" xmlns:r="http://schemas.openxmlformats.org/officeDocument/2006/relationships">
   <p:cSld>
@@ -61845,7 +64960,7 @@
                 </a:solidFill>
                 <a:latin typeface="微软雅黑"/>
               </a:rPr>
-              <a:t>7 / 66</a:t>
+              <a:t>7 / 69</a:t>
             </a:r>
           </a:p>
         </p:txBody>
@@ -62700,7 +65815,7 @@
                 </a:solidFill>
                 <a:latin typeface="微软雅黑"/>
               </a:rPr>
-              <a:t>8 / 66</a:t>
+              <a:t>8 / 69</a:t>
             </a:r>
           </a:p>
         </p:txBody>
@@ -64302,7 +67417,7 @@
                 </a:solidFill>
                 <a:latin typeface="微软雅黑"/>
               </a:rPr>
-              <a:t>9 / 66</a:t>
+              <a:t>9 / 69</a:t>
             </a:r>
           </a:p>
         </p:txBody>
